--- a/Y9_Exploring_Science/9C_Threat_from_disease/9C_L06_Ecology_abundance_and_distribution.pptx
+++ b/Y9_Exploring_Science/9C_Threat_from_disease/9C_L06_Ecology_abundance_and_distribution.pptx
@@ -1740,7 +1740,7 @@
         <p:spPr>
           <a:xfrm>
             <a:off x="548640" y="3657600"/>
-            <a:ext cx="10515600" cy="914400"/>
+            <a:ext cx="10515600" cy="1097280"/>
           </a:xfrm>
           <a:prstGeom prst="rect">
             <a:avLst/>
@@ -1753,7 +1753,7 @@
           <a:lstStyle>
             <a:lvl1pPr indent="0" marL="0">
               <a:buNone/>
-              <a:defRPr lang="en-US" sz="2000" dirty="0">
+              <a:defRPr lang="en-US" sz="2400" dirty="0">
                 <a:solidFill>
                   <a:srgbClr val="FFFFFF"/>
                 </a:solidFill>
@@ -1764,7 +1764,7 @@
             <a:pPr indent="0" marL="0">
               <a:buNone/>
             </a:pPr>
-            <a:endParaRPr lang="en-US" sz="2000" dirty="0"/>
+            <a:endParaRPr lang="en-US" sz="2400" dirty="0"/>
           </a:p>
         </p:txBody>
       </p:sp>
@@ -1864,14 +1864,14 @@
               <a:buNone/>
             </a:pPr>
             <a:r>
-              <a:rPr lang="en-US" sz="900" dirty="0">
+              <a:rPr lang="en-US" sz="1000" dirty="0">
                 <a:solidFill>
                   <a:srgbClr val="5B6574"/>
                 </a:solidFill>
               </a:rPr>
               <a:t>Year 9 Science  |  9C Threat from disease  |  Lesson 6: Ecology: abundance and distribution</a:t>
             </a:r>
-            <a:endParaRPr lang="en-US" sz="900" dirty="0"/>
+            <a:endParaRPr lang="en-US" sz="1000" dirty="0"/>
           </a:p>
         </p:txBody>
       </p:sp>
@@ -2040,14 +2040,14 @@
               <a:buNone/>
             </a:pPr>
             <a:r>
-              <a:rPr lang="en-US" sz="900" dirty="0">
+              <a:rPr lang="en-US" sz="1000" dirty="0">
                 <a:solidFill>
                   <a:srgbClr val="5B6574"/>
                 </a:solidFill>
               </a:rPr>
               <a:t>Year 9 Science  |  9C Threat from disease  |  Lesson 6: Ecology: abundance and distribution</a:t>
             </a:r>
-            <a:endParaRPr lang="en-US" sz="900" dirty="0"/>
+            <a:endParaRPr lang="en-US" sz="1000" dirty="0"/>
           </a:p>
         </p:txBody>
       </p:sp>
@@ -2216,14 +2216,14 @@
               <a:buNone/>
             </a:pPr>
             <a:r>
-              <a:rPr lang="en-US" sz="900" dirty="0">
+              <a:rPr lang="en-US" sz="1000" dirty="0">
                 <a:solidFill>
                   <a:srgbClr val="5B6574"/>
                 </a:solidFill>
               </a:rPr>
               <a:t>Year 9 Science  |  9C Threat from disease  |  Lesson 6: Ecology: abundance and distribution</a:t>
             </a:r>
-            <a:endParaRPr lang="en-US" sz="900" dirty="0"/>
+            <a:endParaRPr lang="en-US" sz="1000" dirty="0"/>
           </a:p>
         </p:txBody>
       </p:sp>
@@ -2352,7 +2352,7 @@
           <a:lstStyle>
             <a:lvl1pPr indent="0" marL="0">
               <a:buNone/>
-              <a:defRPr lang="en-US" sz="3000" b="1" dirty="0">
+              <a:defRPr lang="en-US" sz="3400" b="1" dirty="0">
                 <a:solidFill>
                   <a:srgbClr val="3A2E00"/>
                 </a:solidFill>
@@ -2363,7 +2363,7 @@
             <a:pPr indent="0" marL="0">
               <a:buNone/>
             </a:pPr>
-            <a:endParaRPr lang="en-US" sz="3000" dirty="0"/>
+            <a:endParaRPr lang="en-US" sz="3400" dirty="0"/>
           </a:p>
         </p:txBody>
       </p:sp>
@@ -2780,14 +2780,14 @@
               <a:buNone/>
             </a:pPr>
             <a:r>
-              <a:rPr lang="en-US" sz="1300" b="1" spc="200" kern="0" dirty="0">
+              <a:rPr lang="en-US" sz="1400" b="1" spc="200" kern="0" dirty="0">
                 <a:solidFill>
                   <a:srgbClr val="F2CE3E"/>
                 </a:solidFill>
               </a:rPr>
               <a:t>YEAR 9 SCIENCE  ·  9C THREAT FROM DISEASE  ·  LESSON 6 OF 7</a:t>
             </a:r>
-            <a:endParaRPr lang="en-US" sz="1300" dirty="0"/>
+            <a:endParaRPr lang="en-US" sz="1400" dirty="0"/>
           </a:p>
         </p:txBody>
       </p:sp>
@@ -2840,7 +2840,7 @@
         <p:spPr>
           <a:xfrm>
             <a:off x="548640" y="3657600"/>
-            <a:ext cx="10515600" cy="914400"/>
+            <a:ext cx="10515600" cy="1097280"/>
           </a:xfrm>
           <a:prstGeom prst="rect">
             <a:avLst/>
@@ -2856,14 +2856,14 @@
               <a:buNone/>
             </a:pPr>
             <a:r>
-              <a:rPr lang="en-US" sz="2000" dirty="0">
+              <a:rPr lang="en-US" sz="2400" dirty="0">
                 <a:solidFill>
                   <a:srgbClr val="FFFFFF"/>
                 </a:solidFill>
               </a:rPr>
               <a:t>How do scientists count what cannot be counted?</a:t>
             </a:r>
-            <a:endParaRPr lang="en-US" sz="2000" dirty="0"/>
+            <a:endParaRPr lang="en-US" sz="2400" dirty="0"/>
           </a:p>
         </p:txBody>
       </p:sp>
@@ -2892,14 +2892,14 @@
               <a:buNone/>
             </a:pPr>
             <a:r>
-              <a:rPr lang="en-US" sz="1200" dirty="0">
+              <a:rPr lang="en-US" sz="1400" dirty="0">
                 <a:solidFill>
                   <a:srgbClr val="C9D3E6"/>
                 </a:solidFill>
               </a:rPr>
               <a:t>Exploring Science International 9  ·  Student Book pages 48 to 49  ·  Workbook pages 34 to 35</a:t>
             </a:r>
-            <a:endParaRPr lang="en-US" sz="1200" dirty="0"/>
+            <a:endParaRPr lang="en-US" sz="1400" dirty="0"/>
           </a:p>
         </p:txBody>
       </p:sp>
@@ -3054,7 +3054,7 @@
               <a:buNone/>
             </a:pPr>
             <a:r>
-              <a:rPr lang="en-US" sz="1500" b="1" dirty="0">
+              <a:rPr lang="en-US" sz="1800" b="1" dirty="0">
                 <a:solidFill>
                   <a:srgbClr val="7B3A8E"/>
                 </a:solidFill>
@@ -3065,14 +3065,14 @@
               <a:buNone/>
             </a:pPr>
             <a:r>
-              <a:rPr lang="en-US" sz="1500" dirty="0">
+              <a:rPr lang="en-US" sz="1800" dirty="0">
                 <a:solidFill>
                   <a:srgbClr val="141B26"/>
                 </a:solidFill>
               </a:rPr>
               <a:t>Estimate the population of one plant species (e.g. dandelion, daisy or clover) in a 10 m by 10 m area of the field.</a:t>
             </a:r>
-            <a:endParaRPr lang="en-US" sz="1500" dirty="0"/>
+            <a:endParaRPr lang="en-US" sz="1800" dirty="0"/>
           </a:p>
         </p:txBody>
       </p:sp>
@@ -3101,14 +3101,14 @@
               <a:buNone/>
             </a:pPr>
             <a:r>
-              <a:rPr lang="en-US" sz="1600" b="1" dirty="0">
+              <a:rPr lang="en-US" sz="1800" b="1" dirty="0">
                 <a:solidFill>
                   <a:srgbClr val="0F2A5F"/>
                 </a:solidFill>
               </a:rPr>
               <a:t>Equipment</a:t>
             </a:r>
-            <a:endParaRPr lang="en-US" sz="1600" dirty="0"/>
+            <a:endParaRPr lang="en-US" sz="1800" dirty="0"/>
           </a:p>
         </p:txBody>
       </p:sp>
@@ -3130,273 +3130,269 @@
           <a:ln/>
         </p:spPr>
         <p:txBody>
-          <a:bodyPr wrap="square" lIns="0" tIns="0" rIns="0" bIns="0" rtlCol="0" anchor="t">
-            <a:normAutofit/>
-          </a:bodyPr>
-          <a:lstStyle/>
-          <a:p>
-            <a:pPr marL="228600" indent="-228600">
+          <a:bodyPr wrap="square" lIns="0" tIns="0" rIns="0" bIns="0" rtlCol="0" anchor="t"/>
+          <a:lstStyle/>
+          <a:p>
+            <a:pPr marL="304800" indent="-304800">
+              <a:spcAft>
+                <a:spcPts val="800"/>
+              </a:spcAft>
+              <a:buSzPct val="100000"/>
+              <a:buChar char="•"/>
+            </a:pPr>
+            <a:r>
+              <a:rPr lang="en-US" sz="1600" dirty="0">
+                <a:solidFill>
+                  <a:srgbClr val="141B26"/>
+                </a:solidFill>
+              </a:rPr>
+              <a:t>quadrat 0.5 m x 0.5 m (area 0.25 m2)</a:t>
+            </a:r>
+            <a:endParaRPr lang="en-US" sz="1600" dirty="0"/>
+          </a:p>
+          <a:p>
+            <a:pPr marL="304800" indent="-304800">
+              <a:spcAft>
+                <a:spcPts val="800"/>
+              </a:spcAft>
+              <a:buSzPct val="100000"/>
+              <a:buChar char="•"/>
+            </a:pPr>
+            <a:r>
+              <a:rPr lang="en-US" sz="1600" dirty="0">
+                <a:solidFill>
+                  <a:srgbClr val="141B26"/>
+                </a:solidFill>
+              </a:rPr>
+              <a:t>two tape measures laid along two edges of the area</a:t>
+            </a:r>
+            <a:endParaRPr lang="en-US" sz="1600" dirty="0"/>
+          </a:p>
+          <a:p>
+            <a:pPr marL="304800" indent="-304800">
+              <a:spcAft>
+                <a:spcPts val="800"/>
+              </a:spcAft>
+              <a:buSzPct val="100000"/>
+              <a:buChar char="•"/>
+            </a:pPr>
+            <a:r>
+              <a:rPr lang="en-US" sz="1600" dirty="0">
+                <a:solidFill>
+                  <a:srgbClr val="141B26"/>
+                </a:solidFill>
+              </a:rPr>
+              <a:t>dice or random number table</a:t>
+            </a:r>
+            <a:endParaRPr lang="en-US" sz="1600" dirty="0"/>
+          </a:p>
+          <a:p>
+            <a:pPr marL="304800" indent="-304800">
+              <a:spcAft>
+                <a:spcPts val="800"/>
+              </a:spcAft>
+              <a:buSzPct val="100000"/>
+              <a:buChar char="•"/>
+            </a:pPr>
+            <a:r>
+              <a:rPr lang="en-US" sz="1600" dirty="0">
+                <a:solidFill>
+                  <a:srgbClr val="141B26"/>
+                </a:solidFill>
+              </a:rPr>
+              <a:t>worksheet table (Core 4)</a:t>
+            </a:r>
+            <a:endParaRPr lang="en-US" sz="1600" dirty="0"/>
+          </a:p>
+          <a:p>
+            <a:pPr marL="304800" indent="-304800">
+              <a:spcAft>
+                <a:spcPts val="800"/>
+              </a:spcAft>
+              <a:buSzPct val="100000"/>
+              <a:buChar char="•"/>
+            </a:pPr>
+            <a:r>
+              <a:rPr lang="en-US" sz="1600" dirty="0">
+                <a:solidFill>
+                  <a:srgbClr val="141B26"/>
+                </a:solidFill>
+              </a:rPr>
+              <a:t>indoor version: printed paper field and a card quadrat</a:t>
+            </a:r>
+            <a:endParaRPr lang="en-US" sz="1600" dirty="0"/>
+          </a:p>
+        </p:txBody>
+      </p:sp>
+      <p:sp>
+        <p:nvSpPr>
+          <p:cNvPr id="8" name="Text 6"/>
+          <p:cNvSpPr txBox="1"/>
+          <p:nvPr/>
+        </p:nvSpPr>
+        <p:spPr>
+          <a:xfrm>
+            <a:off x="4937760" y="1828800"/>
+            <a:ext cx="6675120" cy="365760"/>
+          </a:xfrm>
+          <a:prstGeom prst="rect">
+            <a:avLst/>
+          </a:prstGeom>
+          <a:noFill/>
+          <a:ln/>
+        </p:spPr>
+        <p:txBody>
+          <a:bodyPr wrap="square" lIns="0" tIns="0" rIns="0" bIns="0" rtlCol="0" anchor="ctr"/>
+          <a:lstStyle/>
+          <a:p>
+            <a:pPr indent="0" marL="0">
+              <a:buNone/>
+            </a:pPr>
+            <a:r>
+              <a:rPr lang="en-US" sz="1800" b="1" dirty="0">
+                <a:solidFill>
+                  <a:srgbClr val="0F2A5F"/>
+                </a:solidFill>
+              </a:rPr>
+              <a:t>Method</a:t>
+            </a:r>
+            <a:endParaRPr lang="en-US" sz="1800" dirty="0"/>
+          </a:p>
+        </p:txBody>
+      </p:sp>
+      <p:sp>
+        <p:nvSpPr>
+          <p:cNvPr id="9" name="Text 7"/>
+          <p:cNvSpPr txBox="1"/>
+          <p:nvPr/>
+        </p:nvSpPr>
+        <p:spPr>
+          <a:xfrm>
+            <a:off x="4937760" y="2240280"/>
+            <a:ext cx="6675120" cy="3200400"/>
+          </a:xfrm>
+          <a:prstGeom prst="rect">
+            <a:avLst/>
+          </a:prstGeom>
+          <a:noFill/>
+          <a:ln/>
+        </p:spPr>
+        <p:txBody>
+          <a:bodyPr wrap="square" lIns="0" tIns="0" rIns="0" bIns="0" rtlCol="0" anchor="t"/>
+          <a:lstStyle/>
+          <a:p>
+            <a:pPr marL="342900" indent="-342900">
               <a:spcAft>
                 <a:spcPts val="600"/>
               </a:spcAft>
               <a:buSzPct val="100000"/>
-              <a:buChar char="•"/>
-            </a:pPr>
-            <a:r>
-              <a:rPr lang="en-US" sz="1300" dirty="0">
+              <a:buFont typeface="+mj-lt"/>
+              <a:buAutoNum type="arabicPeriod" startAt="1"/>
+            </a:pPr>
+            <a:r>
+              <a:rPr lang="en-US" sz="1600" dirty="0">
                 <a:solidFill>
                   <a:srgbClr val="141B26"/>
                 </a:solidFill>
               </a:rPr>
-              <a:t>quadrat 0.5 m x 0.5 m (area 0.25 m2)</a:t>
-            </a:r>
-            <a:endParaRPr lang="en-US" sz="1300" dirty="0"/>
-          </a:p>
-          <a:p>
-            <a:pPr marL="228600" indent="-228600">
+              <a:t>Lay the tape measures along two sides of the 10 m by 10 m area.</a:t>
+            </a:r>
+            <a:endParaRPr lang="en-US" sz="1600" dirty="0"/>
+          </a:p>
+          <a:p>
+            <a:pPr marL="342900" indent="-342900">
               <a:spcAft>
                 <a:spcPts val="600"/>
               </a:spcAft>
               <a:buSzPct val="100000"/>
-              <a:buChar char="•"/>
-            </a:pPr>
-            <a:r>
-              <a:rPr lang="en-US" sz="1300" dirty="0">
+              <a:buFont typeface="+mj-lt"/>
+              <a:buAutoNum type="arabicPeriod" startAt="1"/>
+            </a:pPr>
+            <a:r>
+              <a:rPr lang="en-US" sz="1600" dirty="0">
                 <a:solidFill>
                   <a:srgbClr val="141B26"/>
                 </a:solidFill>
               </a:rPr>
-              <a:t>two tape measures laid along two edges of the area</a:t>
-            </a:r>
-            <a:endParaRPr lang="en-US" sz="1300" dirty="0"/>
-          </a:p>
-          <a:p>
-            <a:pPr marL="228600" indent="-228600">
+              <a:t>Generate two random numbers from 0 to 9 for the coordinates. Place the quadrat there.</a:t>
+            </a:r>
+            <a:endParaRPr lang="en-US" sz="1600" dirty="0"/>
+          </a:p>
+          <a:p>
+            <a:pPr marL="342900" indent="-342900">
               <a:spcAft>
                 <a:spcPts val="600"/>
               </a:spcAft>
               <a:buSzPct val="100000"/>
-              <a:buChar char="•"/>
-            </a:pPr>
-            <a:r>
-              <a:rPr lang="en-US" sz="1300" dirty="0">
+              <a:buFont typeface="+mj-lt"/>
+              <a:buAutoNum type="arabicPeriod" startAt="1"/>
+            </a:pPr>
+            <a:r>
+              <a:rPr lang="en-US" sz="1600" dirty="0">
                 <a:solidFill>
                   <a:srgbClr val="141B26"/>
                 </a:solidFill>
               </a:rPr>
-              <a:t>dice or random number table</a:t>
-            </a:r>
-            <a:endParaRPr lang="en-US" sz="1300" dirty="0"/>
-          </a:p>
-          <a:p>
-            <a:pPr marL="228600" indent="-228600">
+              <a:t>Count the plants of your species inside the quadrat. Record the count.</a:t>
+            </a:r>
+            <a:endParaRPr lang="en-US" sz="1600" dirty="0"/>
+          </a:p>
+          <a:p>
+            <a:pPr marL="342900" indent="-342900">
               <a:spcAft>
                 <a:spcPts val="600"/>
               </a:spcAft>
               <a:buSzPct val="100000"/>
-              <a:buChar char="•"/>
-            </a:pPr>
-            <a:r>
-              <a:rPr lang="en-US" sz="1300" dirty="0">
+              <a:buFont typeface="+mj-lt"/>
+              <a:buAutoNum type="arabicPeriod" startAt="1"/>
+            </a:pPr>
+            <a:r>
+              <a:rPr lang="en-US" sz="1600" dirty="0">
                 <a:solidFill>
                   <a:srgbClr val="141B26"/>
                 </a:solidFill>
               </a:rPr>
-              <a:t>worksheet table (Core 4)</a:t>
-            </a:r>
-            <a:endParaRPr lang="en-US" sz="1300" dirty="0"/>
-          </a:p>
-          <a:p>
-            <a:pPr marL="228600" indent="-228600">
+              <a:t>Repeat for 8 quadrats in total.</a:t>
+            </a:r>
+            <a:endParaRPr lang="en-US" sz="1600" dirty="0"/>
+          </a:p>
+          <a:p>
+            <a:pPr marL="342900" indent="-342900">
               <a:spcAft>
                 <a:spcPts val="600"/>
               </a:spcAft>
               <a:buSzPct val="100000"/>
-              <a:buChar char="•"/>
-            </a:pPr>
-            <a:r>
-              <a:rPr lang="en-US" sz="1300" dirty="0">
+              <a:buFont typeface="+mj-lt"/>
+              <a:buAutoNum type="arabicPeriod" startAt="1"/>
+            </a:pPr>
+            <a:r>
+              <a:rPr lang="en-US" sz="1600" dirty="0">
                 <a:solidFill>
                   <a:srgbClr val="141B26"/>
                 </a:solidFill>
               </a:rPr>
-              <a:t>indoor version: printed paper field and a card quadrat</a:t>
-            </a:r>
-            <a:endParaRPr lang="en-US" sz="1300" dirty="0"/>
-          </a:p>
-        </p:txBody>
-      </p:sp>
-      <p:sp>
-        <p:nvSpPr>
-          <p:cNvPr id="8" name="Text 6"/>
-          <p:cNvSpPr txBox="1"/>
-          <p:nvPr/>
-        </p:nvSpPr>
-        <p:spPr>
-          <a:xfrm>
-            <a:off x="4937760" y="1828800"/>
-            <a:ext cx="6675120" cy="365760"/>
-          </a:xfrm>
-          <a:prstGeom prst="rect">
-            <a:avLst/>
-          </a:prstGeom>
-          <a:noFill/>
-          <a:ln/>
-        </p:spPr>
-        <p:txBody>
-          <a:bodyPr wrap="square" lIns="0" tIns="0" rIns="0" bIns="0" rtlCol="0" anchor="ctr"/>
-          <a:lstStyle/>
-          <a:p>
-            <a:pPr indent="0" marL="0">
-              <a:buNone/>
-            </a:pPr>
-            <a:r>
-              <a:rPr lang="en-US" sz="1600" b="1" dirty="0">
-                <a:solidFill>
-                  <a:srgbClr val="0F2A5F"/>
-                </a:solidFill>
-              </a:rPr>
-              <a:t>Method</a:t>
+              <a:t>Calculate: total counted x 100 m2 / (8 x 0.25 m2).</a:t>
             </a:r>
             <a:endParaRPr lang="en-US" sz="1600" dirty="0"/>
           </a:p>
-        </p:txBody>
-      </p:sp>
-      <p:sp>
-        <p:nvSpPr>
-          <p:cNvPr id="9" name="Text 7"/>
-          <p:cNvSpPr txBox="1"/>
-          <p:nvPr/>
-        </p:nvSpPr>
-        <p:spPr>
-          <a:xfrm>
-            <a:off x="4937760" y="2240280"/>
-            <a:ext cx="6675120" cy="3200400"/>
-          </a:xfrm>
-          <a:prstGeom prst="rect">
-            <a:avLst/>
-          </a:prstGeom>
-          <a:noFill/>
-          <a:ln/>
-        </p:spPr>
-        <p:txBody>
-          <a:bodyPr wrap="square" lIns="0" tIns="0" rIns="0" bIns="0" rtlCol="0" anchor="t">
-            <a:normAutofit/>
-          </a:bodyPr>
-          <a:lstStyle/>
           <a:p>
             <a:pPr marL="342900" indent="-342900">
               <a:spcAft>
-                <a:spcPts val="500"/>
+                <a:spcPts val="600"/>
               </a:spcAft>
               <a:buSzPct val="100000"/>
               <a:buFont typeface="+mj-lt"/>
               <a:buAutoNum type="arabicPeriod" startAt="1"/>
             </a:pPr>
             <a:r>
-              <a:rPr lang="en-US" sz="1300" dirty="0">
+              <a:rPr lang="en-US" sz="1600" dirty="0">
                 <a:solidFill>
                   <a:srgbClr val="141B26"/>
                 </a:solidFill>
               </a:rPr>
-              <a:t>Lay the tape measures along two sides of the 10 m by 10 m area.</a:t>
-            </a:r>
-            <a:endParaRPr lang="en-US" sz="1300" dirty="0"/>
-          </a:p>
-          <a:p>
-            <a:pPr marL="342900" indent="-342900">
-              <a:spcAft>
-                <a:spcPts val="500"/>
-              </a:spcAft>
-              <a:buSzPct val="100000"/>
-              <a:buFont typeface="+mj-lt"/>
-              <a:buAutoNum type="arabicPeriod" startAt="1"/>
-            </a:pPr>
-            <a:r>
-              <a:rPr lang="en-US" sz="1300" dirty="0">
-                <a:solidFill>
-                  <a:srgbClr val="141B26"/>
-                </a:solidFill>
-              </a:rPr>
-              <a:t>Generate two random numbers from 0 to 9 for the coordinates. Place the quadrat there.</a:t>
-            </a:r>
-            <a:endParaRPr lang="en-US" sz="1300" dirty="0"/>
-          </a:p>
-          <a:p>
-            <a:pPr marL="342900" indent="-342900">
-              <a:spcAft>
-                <a:spcPts val="500"/>
-              </a:spcAft>
-              <a:buSzPct val="100000"/>
-              <a:buFont typeface="+mj-lt"/>
-              <a:buAutoNum type="arabicPeriod" startAt="1"/>
-            </a:pPr>
-            <a:r>
-              <a:rPr lang="en-US" sz="1300" dirty="0">
-                <a:solidFill>
-                  <a:srgbClr val="141B26"/>
-                </a:solidFill>
-              </a:rPr>
-              <a:t>Count the plants of your species inside the quadrat. Record the count.</a:t>
-            </a:r>
-            <a:endParaRPr lang="en-US" sz="1300" dirty="0"/>
-          </a:p>
-          <a:p>
-            <a:pPr marL="342900" indent="-342900">
-              <a:spcAft>
-                <a:spcPts val="500"/>
-              </a:spcAft>
-              <a:buSzPct val="100000"/>
-              <a:buFont typeface="+mj-lt"/>
-              <a:buAutoNum type="arabicPeriod" startAt="1"/>
-            </a:pPr>
-            <a:r>
-              <a:rPr lang="en-US" sz="1300" dirty="0">
-                <a:solidFill>
-                  <a:srgbClr val="141B26"/>
-                </a:solidFill>
-              </a:rPr>
-              <a:t>Repeat for 8 quadrats in total.</a:t>
-            </a:r>
-            <a:endParaRPr lang="en-US" sz="1300" dirty="0"/>
-          </a:p>
-          <a:p>
-            <a:pPr marL="342900" indent="-342900">
-              <a:spcAft>
-                <a:spcPts val="500"/>
-              </a:spcAft>
-              <a:buSzPct val="100000"/>
-              <a:buFont typeface="+mj-lt"/>
-              <a:buAutoNum type="arabicPeriod" startAt="1"/>
-            </a:pPr>
-            <a:r>
-              <a:rPr lang="en-US" sz="1300" dirty="0">
-                <a:solidFill>
-                  <a:srgbClr val="141B26"/>
-                </a:solidFill>
-              </a:rPr>
-              <a:t>Calculate: total counted x 100 m2 / (8 x 0.25 m2).</a:t>
-            </a:r>
-            <a:endParaRPr lang="en-US" sz="1300" dirty="0"/>
-          </a:p>
-          <a:p>
-            <a:pPr marL="342900" indent="-342900">
-              <a:spcAft>
-                <a:spcPts val="500"/>
-              </a:spcAft>
-              <a:buSzPct val="100000"/>
-              <a:buFont typeface="+mj-lt"/>
-              <a:buAutoNum type="arabicPeriod" startAt="1"/>
-            </a:pPr>
-            <a:r>
-              <a:rPr lang="en-US" sz="1300" dirty="0">
-                <a:solidFill>
-                  <a:srgbClr val="141B26"/>
-                </a:solidFill>
-              </a:rPr>
               <a:t>Compare your estimate with another group's. Why are they different?</a:t>
             </a:r>
-            <a:endParaRPr lang="en-US" sz="1300" dirty="0"/>
+            <a:endParaRPr lang="en-US" sz="1600" dirty="0"/>
           </a:p>
         </p:txBody>
       </p:sp>
@@ -3443,16 +3439,14 @@
           <a:ln/>
         </p:spPr>
         <p:txBody>
-          <a:bodyPr wrap="square" lIns="0" tIns="0" rIns="0" bIns="0" rtlCol="0" anchor="ctr">
-            <a:normAutofit/>
-          </a:bodyPr>
+          <a:bodyPr wrap="square" lIns="0" tIns="0" rIns="0" bIns="0" rtlCol="0" anchor="ctr"/>
           <a:lstStyle/>
           <a:p>
             <a:pPr indent="0" marL="0">
               <a:buNone/>
             </a:pPr>
             <a:r>
-              <a:rPr lang="en-US" sz="1300" b="1" dirty="0">
+              <a:rPr lang="en-US" sz="1500" b="1" dirty="0">
                 <a:solidFill>
                   <a:srgbClr val="3A2E00"/>
                 </a:solidFill>
@@ -3463,14 +3457,14 @@
               <a:buNone/>
             </a:pPr>
             <a:r>
-              <a:rPr lang="en-US" sz="1300" dirty="0">
+              <a:rPr lang="en-US" sz="1500" dirty="0">
                 <a:solidFill>
                   <a:srgbClr val="3A2E00"/>
                 </a:solidFill>
               </a:rPr>
               <a:t>Stay inside the marked area; watch for uneven ground; wash hands afterwards.</a:t>
             </a:r>
-            <a:endParaRPr lang="en-US" sz="1300" dirty="0"/>
+            <a:endParaRPr lang="en-US" sz="1500" dirty="0"/>
           </a:p>
         </p:txBody>
       </p:sp>
@@ -3663,23 +3657,21 @@
           <a:ln/>
         </p:spPr>
         <p:txBody>
-          <a:bodyPr wrap="square" lIns="0" tIns="0" rIns="0" bIns="0" rtlCol="0" anchor="t">
-            <a:normAutofit/>
-          </a:bodyPr>
+          <a:bodyPr wrap="square" lIns="0" tIns="0" rIns="0" bIns="0" rtlCol="0" anchor="t"/>
           <a:lstStyle/>
           <a:p>
             <a:pPr indent="0" marL="0">
               <a:buNone/>
             </a:pPr>
             <a:r>
-              <a:rPr lang="en-US" sz="2200" b="1" dirty="0">
+              <a:rPr lang="en-US" sz="2400" b="1" dirty="0">
                 <a:solidFill>
                   <a:srgbClr val="0F2A5F"/>
                 </a:solidFill>
               </a:rPr>
               <a:t>Gannets nest on a small island, each pair the same distance from its neighbours. Describe their distribution. How could you estimate the number of gannets nesting on the island?</a:t>
             </a:r>
-            <a:endParaRPr lang="en-US" sz="2200" dirty="0"/>
+            <a:endParaRPr lang="en-US" sz="2400" dirty="0"/>
           </a:p>
         </p:txBody>
       </p:sp>
@@ -3728,9 +3720,7 @@
           <a:ln/>
         </p:spPr>
         <p:txBody>
-          <a:bodyPr wrap="square" lIns="0" tIns="0" rIns="0" bIns="0" rtlCol="0" anchor="t">
-            <a:normAutofit/>
-          </a:bodyPr>
+          <a:bodyPr wrap="square" lIns="0" tIns="0" rIns="0" bIns="0" rtlCol="0" anchor="t"/>
           <a:lstStyle/>
           <a:p>
             <a:pPr indent="0" marL="0">
@@ -3740,14 +3730,14 @@
               <a:buNone/>
             </a:pPr>
             <a:r>
-              <a:rPr lang="en-US" sz="1500" b="1" dirty="0">
+              <a:rPr lang="en-US" sz="1800" b="1" dirty="0">
                 <a:solidFill>
                   <a:srgbClr val="7B3A8E"/>
                 </a:solidFill>
               </a:rPr>
               <a:t>Sentence frames</a:t>
             </a:r>
-            <a:endParaRPr lang="en-US" sz="1500" dirty="0"/>
+            <a:endParaRPr lang="en-US" sz="1800" dirty="0"/>
           </a:p>
           <a:p>
             <a:pPr indent="0" marL="0">
@@ -3757,14 +3747,14 @@
               <a:buNone/>
             </a:pPr>
             <a:r>
-              <a:rPr lang="en-US" sz="1500" dirty="0">
+              <a:rPr lang="en-US" sz="1800" dirty="0">
                 <a:solidFill>
                   <a:srgbClr val="141B26"/>
                 </a:solidFill>
               </a:rPr>
               <a:t>The gannets show a ___ distribution because ___.</a:t>
             </a:r>
-            <a:endParaRPr lang="en-US" sz="1500" dirty="0"/>
+            <a:endParaRPr lang="en-US" sz="1800" dirty="0"/>
           </a:p>
           <a:p>
             <a:pPr indent="0" marL="0">
@@ -3774,14 +3764,14 @@
               <a:buNone/>
             </a:pPr>
             <a:r>
-              <a:rPr lang="en-US" sz="1500" dirty="0">
+              <a:rPr lang="en-US" sz="1800" dirty="0">
                 <a:solidFill>
                   <a:srgbClr val="141B26"/>
                 </a:solidFill>
               </a:rPr>
               <a:t>To estimate the number, I would ___ and then ___.</a:t>
             </a:r>
-            <a:endParaRPr lang="en-US" sz="1500" dirty="0"/>
+            <a:endParaRPr lang="en-US" sz="1800" dirty="0"/>
           </a:p>
           <a:p>
             <a:pPr indent="0" marL="0">
@@ -3791,14 +3781,14 @@
               <a:buNone/>
             </a:pPr>
             <a:r>
-              <a:rPr lang="en-US" sz="1500" dirty="0">
+              <a:rPr lang="en-US" sz="1800" dirty="0">
                 <a:solidFill>
                   <a:srgbClr val="141B26"/>
                 </a:solidFill>
               </a:rPr>
               <a:t>The estimate would be more accurate if ___.</a:t>
             </a:r>
-            <a:endParaRPr lang="en-US" sz="1500" dirty="0"/>
+            <a:endParaRPr lang="en-US" sz="1800" dirty="0"/>
           </a:p>
         </p:txBody>
       </p:sp>
@@ -3835,7 +3825,7 @@
         <p:spPr>
           <a:xfrm>
             <a:off x="6766560" y="5412775"/>
-            <a:ext cx="4846320" cy="502920"/>
+            <a:ext cx="4846320" cy="548640"/>
           </a:xfrm>
           <a:prstGeom prst="rect">
             <a:avLst/>
@@ -3851,7 +3841,7 @@
               <a:buNone/>
             </a:pPr>
             <a:r>
-              <a:rPr lang="en-US" sz="1100" dirty="0">
+              <a:rPr lang="en-US" sz="1300" dirty="0">
                 <a:solidFill>
                   <a:srgbClr val="141B26"/>
                 </a:solidFill>
@@ -3861,21 +3851,21 @@
             <a:pPr algn="l" indent="0" marL="0">
               <a:buNone/>
             </a:pPr>
-            <a:endParaRPr lang="en-US" sz="1100" dirty="0"/>
+            <a:endParaRPr lang="en-US" sz="1300" dirty="0"/>
           </a:p>
           <a:p>
             <a:pPr algn="l" indent="0" marL="0">
               <a:buNone/>
             </a:pPr>
             <a:r>
-              <a:rPr lang="en-US" sz="800" dirty="0">
+              <a:rPr lang="en-US" sz="900" dirty="0">
                 <a:solidFill>
                   <a:srgbClr val="5B6574"/>
                 </a:solidFill>
               </a:rPr>
               <a:t>Image: SidPix, CC BY 2.0, via Wikimedia Commons</a:t>
             </a:r>
-            <a:endParaRPr lang="en-US" sz="1100" dirty="0"/>
+            <a:endParaRPr lang="en-US" sz="1300" dirty="0"/>
           </a:p>
         </p:txBody>
       </p:sp>
@@ -4075,14 +4065,14 @@
               <a:buNone/>
             </a:pPr>
             <a:r>
-              <a:rPr lang="en-US" sz="1400" i="1" dirty="0">
+              <a:rPr lang="en-US" sz="1600" i="1" dirty="0">
                 <a:solidFill>
                   <a:srgbClr val="5B6574"/>
                 </a:solidFill>
               </a:rPr>
               <a:t>On your worksheet exit ticket. Work alone. Hand it in as you leave.</a:t>
             </a:r>
-            <a:endParaRPr lang="en-US" sz="1400" dirty="0"/>
+            <a:endParaRPr lang="en-US" sz="1600" dirty="0"/>
           </a:p>
         </p:txBody>
       </p:sp>
@@ -4095,25 +4085,23 @@
         <p:spPr>
           <a:xfrm>
             <a:off x="548640" y="1828800"/>
-            <a:ext cx="10881360" cy="1188720"/>
-          </a:xfrm>
-          <a:prstGeom prst="rect">
-            <a:avLst/>
-          </a:prstGeom>
-          <a:noFill/>
-          <a:ln/>
-        </p:spPr>
-        <p:txBody>
-          <a:bodyPr wrap="square" lIns="0" tIns="0" rIns="0" bIns="0" rtlCol="0" anchor="t">
-            <a:normAutofit/>
-          </a:bodyPr>
+            <a:ext cx="9692640" cy="1188720"/>
+          </a:xfrm>
+          <a:prstGeom prst="rect">
+            <a:avLst/>
+          </a:prstGeom>
+          <a:noFill/>
+          <a:ln/>
+        </p:spPr>
+        <p:txBody>
+          <a:bodyPr wrap="square" lIns="0" tIns="0" rIns="0" bIns="0" rtlCol="0" anchor="t"/>
           <a:lstStyle/>
           <a:p>
             <a:pPr indent="0" marL="0">
               <a:buNone/>
             </a:pPr>
             <a:r>
-              <a:rPr lang="en-US" sz="1800" b="1" dirty="0">
+              <a:rPr lang="en-US" sz="2200" b="1" dirty="0">
                 <a:solidFill>
                   <a:srgbClr val="7B3A8E"/>
                 </a:solidFill>
@@ -4124,14 +4112,14 @@
               <a:buNone/>
             </a:pPr>
             <a:r>
-              <a:rPr lang="en-US" sz="1800" dirty="0">
+              <a:rPr lang="en-US" sz="2200" dirty="0">
                 <a:solidFill>
                   <a:srgbClr val="141B26"/>
                 </a:solidFill>
               </a:rPr>
               <a:t>Why do ecologists take samples instead of counting every organism?</a:t>
             </a:r>
-            <a:endParaRPr lang="en-US" sz="1800" dirty="0"/>
+            <a:endParaRPr lang="en-US" sz="2200" dirty="0"/>
           </a:p>
         </p:txBody>
       </p:sp>
@@ -4144,25 +4132,23 @@
         <p:spPr>
           <a:xfrm>
             <a:off x="548640" y="3017520"/>
-            <a:ext cx="10881360" cy="1188720"/>
-          </a:xfrm>
-          <a:prstGeom prst="rect">
-            <a:avLst/>
-          </a:prstGeom>
-          <a:noFill/>
-          <a:ln/>
-        </p:spPr>
-        <p:txBody>
-          <a:bodyPr wrap="square" lIns="0" tIns="0" rIns="0" bIns="0" rtlCol="0" anchor="t">
-            <a:normAutofit/>
-          </a:bodyPr>
+            <a:ext cx="9692640" cy="1188720"/>
+          </a:xfrm>
+          <a:prstGeom prst="rect">
+            <a:avLst/>
+          </a:prstGeom>
+          <a:noFill/>
+          <a:ln/>
+        </p:spPr>
+        <p:txBody>
+          <a:bodyPr wrap="square" lIns="0" tIns="0" rIns="0" bIns="0" rtlCol="0" anchor="t"/>
           <a:lstStyle/>
           <a:p>
             <a:pPr indent="0" marL="0">
               <a:buNone/>
             </a:pPr>
             <a:r>
-              <a:rPr lang="en-US" sz="1800" b="1" dirty="0">
+              <a:rPr lang="en-US" sz="2200" b="1" dirty="0">
                 <a:solidFill>
                   <a:srgbClr val="7B3A8E"/>
                 </a:solidFill>
@@ -4173,14 +4159,14 @@
               <a:buNone/>
             </a:pPr>
             <a:r>
-              <a:rPr lang="en-US" sz="1800" dirty="0">
+              <a:rPr lang="en-US" sz="2200" dirty="0">
                 <a:solidFill>
                   <a:srgbClr val="141B26"/>
                 </a:solidFill>
               </a:rPr>
               <a:t>5 daisies were found in one 0.25 m2 quadrat. The lawn is 40 m2. Estimate the daisy population.</a:t>
             </a:r>
-            <a:endParaRPr lang="en-US" sz="1800" dirty="0"/>
+            <a:endParaRPr lang="en-US" sz="2200" dirty="0"/>
           </a:p>
         </p:txBody>
       </p:sp>
@@ -4193,25 +4179,23 @@
         <p:spPr>
           <a:xfrm>
             <a:off x="548640" y="4206240"/>
-            <a:ext cx="10881360" cy="1188720"/>
-          </a:xfrm>
-          <a:prstGeom prst="rect">
-            <a:avLst/>
-          </a:prstGeom>
-          <a:noFill/>
-          <a:ln/>
-        </p:spPr>
-        <p:txBody>
-          <a:bodyPr wrap="square" lIns="0" tIns="0" rIns="0" bIns="0" rtlCol="0" anchor="t">
-            <a:normAutofit/>
-          </a:bodyPr>
+            <a:ext cx="9692640" cy="1188720"/>
+          </a:xfrm>
+          <a:prstGeom prst="rect">
+            <a:avLst/>
+          </a:prstGeom>
+          <a:noFill/>
+          <a:ln/>
+        </p:spPr>
+        <p:txBody>
+          <a:bodyPr wrap="square" lIns="0" tIns="0" rIns="0" bIns="0" rtlCol="0" anchor="t"/>
           <a:lstStyle/>
           <a:p>
             <a:pPr indent="0" marL="0">
               <a:buNone/>
             </a:pPr>
             <a:r>
-              <a:rPr lang="en-US" sz="1800" b="1" dirty="0">
+              <a:rPr lang="en-US" sz="2200" b="1" dirty="0">
                 <a:solidFill>
                   <a:srgbClr val="7B3A8E"/>
                 </a:solidFill>
@@ -4222,14 +4206,14 @@
               <a:buNone/>
             </a:pPr>
             <a:r>
-              <a:rPr lang="en-US" sz="1800" dirty="0">
+              <a:rPr lang="en-US" sz="2200" dirty="0">
                 <a:solidFill>
                   <a:srgbClr val="141B26"/>
                 </a:solidFill>
               </a:rPr>
               <a:t>Give one reason why quadrats should be placed at random.</a:t>
             </a:r>
-            <a:endParaRPr lang="en-US" sz="1800" dirty="0"/>
+            <a:endParaRPr lang="en-US" sz="2200" dirty="0"/>
           </a:p>
         </p:txBody>
       </p:sp>
@@ -4488,90 +4472,88 @@
         <p:spPr>
           <a:xfrm>
             <a:off x="548640" y="1371600"/>
-            <a:ext cx="10881360" cy="4480560"/>
-          </a:xfrm>
-          <a:prstGeom prst="rect">
-            <a:avLst/>
-          </a:prstGeom>
-          <a:noFill/>
-          <a:ln/>
-        </p:spPr>
-        <p:txBody>
-          <a:bodyPr wrap="square" lIns="0" tIns="0" rIns="0" bIns="0" rtlCol="0" anchor="t">
-            <a:normAutofit/>
-          </a:bodyPr>
+            <a:ext cx="10881360" cy="4114800"/>
+          </a:xfrm>
+          <a:prstGeom prst="rect">
+            <a:avLst/>
+          </a:prstGeom>
+          <a:noFill/>
+          <a:ln/>
+        </p:spPr>
+        <p:txBody>
+          <a:bodyPr wrap="square" lIns="0" tIns="0" rIns="0" bIns="0" rtlCol="0" anchor="t"/>
           <a:lstStyle/>
           <a:p>
             <a:pPr marL="342900" indent="-342900">
               <a:spcAft>
-                <a:spcPts val="1000"/>
+                <a:spcPts val="1200"/>
               </a:spcAft>
               <a:buSzPct val="100000"/>
               <a:buChar char="✓"/>
             </a:pPr>
             <a:r>
-              <a:rPr lang="en-US" sz="1700" dirty="0">
+              <a:rPr lang="en-US" sz="2000" dirty="0">
                 <a:solidFill>
                   <a:srgbClr val="141B26"/>
                 </a:solidFill>
               </a:rPr>
               <a:t>Abundance is how common a species is; you estimate it from samples with the right method: quadrat, pitfall trap, sweep net, pooter.</a:t>
             </a:r>
-            <a:endParaRPr lang="en-US" sz="1700" dirty="0"/>
+            <a:endParaRPr lang="en-US" sz="2000" dirty="0"/>
           </a:p>
           <a:p>
             <a:pPr marL="342900" indent="-342900">
               <a:spcAft>
-                <a:spcPts val="1000"/>
+                <a:spcPts val="1200"/>
               </a:spcAft>
               <a:buSzPct val="100000"/>
               <a:buChar char="✓"/>
             </a:pPr>
             <a:r>
-              <a:rPr lang="en-US" sz="1700" dirty="0">
+              <a:rPr lang="en-US" sz="2000" dirty="0">
                 <a:solidFill>
                   <a:srgbClr val="141B26"/>
                 </a:solidFill>
               </a:rPr>
               <a:t>Population size = number in sample x total area / area sampled.</a:t>
             </a:r>
-            <a:endParaRPr lang="en-US" sz="1700" dirty="0"/>
+            <a:endParaRPr lang="en-US" sz="2000" dirty="0"/>
           </a:p>
           <a:p>
             <a:pPr marL="342900" indent="-342900">
               <a:spcAft>
-                <a:spcPts val="1000"/>
+                <a:spcPts val="1200"/>
               </a:spcAft>
               <a:buSzPct val="100000"/>
               <a:buChar char="✓"/>
             </a:pPr>
             <a:r>
-              <a:rPr lang="en-US" sz="1700" dirty="0">
+              <a:rPr lang="en-US" sz="2000" dirty="0">
                 <a:solidFill>
                   <a:srgbClr val="141B26"/>
                 </a:solidFill>
               </a:rPr>
               <a:t>Estimates are more accurate with larger, random samples of organisms that are easy to find.</a:t>
             </a:r>
-            <a:endParaRPr lang="en-US" sz="1700" dirty="0"/>
+            <a:endParaRPr lang="en-US" sz="2000" dirty="0"/>
           </a:p>
           <a:p>
             <a:pPr marL="342900" indent="-342900">
               <a:spcAft>
-                <a:spcPts val="1000"/>
+                <a:spcPts val="1200"/>
               </a:spcAft>
               <a:buSzPct val="100000"/>
               <a:buChar char="✓"/>
             </a:pPr>
             <a:r>
-              <a:rPr lang="en-US" sz="1700" dirty="0">
+              <a:rPr lang="en-US" sz="2000" dirty="0">
                 <a:solidFill>
                   <a:srgbClr val="141B26"/>
                 </a:solidFill>
               </a:rPr>
               <a:t>Distribution can be random, regular or clumped; a transect shows distribution along a line.</a:t>
             </a:r>
-            <a:endParaRPr lang="en-US" sz="1700" dirty="0"/>
+            <a:endParaRPr lang="en-US" sz="2000" dirty="0"/>
           </a:p>
         </p:txBody>
       </p:sp>
@@ -4600,7 +4582,7 @@
               <a:buNone/>
             </a:pPr>
             <a:r>
-              <a:rPr lang="en-US" sz="1300" b="1" dirty="0">
+              <a:rPr lang="en-US" sz="1500" b="1" dirty="0">
                 <a:solidFill>
                   <a:srgbClr val="7B3A8E"/>
                 </a:solidFill>
@@ -4611,14 +4593,14 @@
               <a:buNone/>
             </a:pPr>
             <a:r>
-              <a:rPr lang="en-US" sz="1300" dirty="0">
+              <a:rPr lang="en-US" sz="1500" dirty="0">
                 <a:solidFill>
                   <a:srgbClr val="141B26"/>
                 </a:solidFill>
               </a:rPr>
               <a:t>In and out: why surface area matters for cells and organisms, and how water moves by osmosis.</a:t>
             </a:r>
-            <a:endParaRPr lang="en-US" sz="1300" dirty="0"/>
+            <a:endParaRPr lang="en-US" sz="1500" dirty="0"/>
           </a:p>
         </p:txBody>
       </p:sp>
@@ -4886,77 +4868,75 @@
           <a:ln/>
         </p:spPr>
         <p:txBody>
-          <a:bodyPr wrap="square" lIns="0" tIns="0" rIns="0" bIns="0" rtlCol="0" anchor="t">
-            <a:normAutofit/>
-          </a:bodyPr>
+          <a:bodyPr wrap="square" lIns="0" tIns="0" rIns="0" bIns="0" rtlCol="0" anchor="t"/>
           <a:lstStyle/>
           <a:p>
             <a:pPr indent="0" marL="0">
               <a:spcAft>
-                <a:spcPts val="1000"/>
+                <a:spcPts val="1200"/>
               </a:spcAft>
               <a:buNone/>
             </a:pPr>
             <a:r>
-              <a:rPr lang="en-US" sz="2000" dirty="0">
+              <a:rPr lang="en-US" sz="2400" dirty="0">
                 <a:solidFill>
                   <a:srgbClr val="141B26"/>
                 </a:solidFill>
               </a:rPr>
               <a:t>During a disease outbreak, scientists cannot count every infected person, so they estimate.</a:t>
             </a:r>
-            <a:endParaRPr lang="en-US" sz="2000" dirty="0"/>
+            <a:endParaRPr lang="en-US" sz="2400" dirty="0"/>
           </a:p>
           <a:p>
             <a:pPr indent="0" marL="0">
               <a:spcAft>
-                <a:spcPts val="1000"/>
+                <a:spcPts val="1200"/>
               </a:spcAft>
               <a:buNone/>
             </a:pPr>
             <a:r>
-              <a:rPr lang="en-US" sz="2000" dirty="0">
+              <a:rPr lang="en-US" sz="2400" dirty="0">
                 <a:solidFill>
                   <a:srgbClr val="141B26"/>
                 </a:solidFill>
               </a:rPr>
               <a:t>1. What does 'estimate' mean?</a:t>
             </a:r>
-            <a:endParaRPr lang="en-US" sz="2000" dirty="0"/>
+            <a:endParaRPr lang="en-US" sz="2400" dirty="0"/>
           </a:p>
           <a:p>
             <a:pPr indent="0" marL="0">
               <a:spcAft>
-                <a:spcPts val="1000"/>
+                <a:spcPts val="1200"/>
               </a:spcAft>
               <a:buNone/>
             </a:pPr>
             <a:r>
-              <a:rPr lang="en-US" sz="2000" dirty="0">
+              <a:rPr lang="en-US" sz="2400" dirty="0">
                 <a:solidFill>
                   <a:srgbClr val="141B26"/>
                 </a:solidFill>
               </a:rPr>
               <a:t>2. Suggest how you could estimate the number of dandelions on the school field without counting them all.</a:t>
             </a:r>
-            <a:endParaRPr lang="en-US" sz="2000" dirty="0"/>
+            <a:endParaRPr lang="en-US" sz="2400" dirty="0"/>
           </a:p>
           <a:p>
             <a:pPr indent="0" marL="0">
               <a:spcAft>
-                <a:spcPts val="1000"/>
+                <a:spcPts val="1200"/>
               </a:spcAft>
               <a:buNone/>
             </a:pPr>
             <a:r>
-              <a:rPr lang="en-US" sz="2000" dirty="0">
+              <a:rPr lang="en-US" sz="2400" dirty="0">
                 <a:solidFill>
                   <a:srgbClr val="141B26"/>
                 </a:solidFill>
               </a:rPr>
               <a:t>3. Name one abiotic and one biotic factor that could affect how many dandelions there are.</a:t>
             </a:r>
-            <a:endParaRPr lang="en-US" sz="2000" dirty="0"/>
+            <a:endParaRPr lang="en-US" sz="2400" dirty="0"/>
           </a:p>
         </p:txBody>
       </p:sp>
@@ -5139,8 +5119,8 @@
         </p:nvSpPr>
         <p:spPr>
           <a:xfrm>
-            <a:off x="548640" y="1325880"/>
-            <a:ext cx="5669280" cy="457200"/>
+            <a:off x="548640" y="1280160"/>
+            <a:ext cx="5486400" cy="411480"/>
           </a:xfrm>
           <a:prstGeom prst="rect">
             <a:avLst/>
@@ -5156,14 +5136,14 @@
               <a:buNone/>
             </a:pPr>
             <a:r>
-              <a:rPr lang="en-US" sz="2000" b="1" dirty="0">
+              <a:rPr lang="en-US" sz="2200" b="1" dirty="0">
                 <a:solidFill>
                   <a:srgbClr val="7B3A8E"/>
                 </a:solidFill>
               </a:rPr>
               <a:t>Today I can ...</a:t>
             </a:r>
-            <a:endParaRPr lang="en-US" sz="2000" dirty="0"/>
+            <a:endParaRPr lang="en-US" sz="2200" dirty="0"/>
           </a:p>
         </p:txBody>
       </p:sp>
@@ -5175,8 +5155,8 @@
         </p:nvSpPr>
         <p:spPr>
           <a:xfrm>
-            <a:off x="594360" y="1947672"/>
-            <a:ext cx="292608" cy="292608"/>
+            <a:off x="594360" y="1810512"/>
+            <a:ext cx="310896" cy="310896"/>
           </a:xfrm>
           <a:prstGeom prst="rect">
             <a:avLst/>
@@ -5200,33 +5180,31 @@
         </p:nvSpPr>
         <p:spPr>
           <a:xfrm>
-            <a:off x="1051560" y="1874520"/>
-            <a:ext cx="5120640" cy="868680"/>
-          </a:xfrm>
-          <a:prstGeom prst="rect">
-            <a:avLst/>
-          </a:prstGeom>
-          <a:noFill/>
-          <a:ln/>
-        </p:spPr>
-        <p:txBody>
-          <a:bodyPr wrap="square" lIns="0" tIns="0" rIns="0" bIns="0" rtlCol="0" anchor="t">
-            <a:normAutofit/>
-          </a:bodyPr>
+            <a:off x="1097280" y="1737360"/>
+            <a:ext cx="10332720" cy="868680"/>
+          </a:xfrm>
+          <a:prstGeom prst="rect">
+            <a:avLst/>
+          </a:prstGeom>
+          <a:noFill/>
+          <a:ln/>
+        </p:spPr>
+        <p:txBody>
+          <a:bodyPr wrap="square" lIns="0" tIns="0" rIns="0" bIns="0" rtlCol="0" anchor="t"/>
           <a:lstStyle/>
           <a:p>
             <a:pPr indent="0" marL="0">
               <a:buNone/>
             </a:pPr>
             <a:r>
-              <a:rPr lang="en-US" sz="1600" dirty="0">
+              <a:rPr lang="en-US" sz="2000" dirty="0">
                 <a:solidFill>
                   <a:srgbClr val="141B26"/>
                 </a:solidFill>
               </a:rPr>
               <a:t>I can choose suitable apparatus for measuring the abundance and distribution of organisms.</a:t>
             </a:r>
-            <a:endParaRPr lang="en-US" sz="1600" dirty="0"/>
+            <a:endParaRPr lang="en-US" sz="2000" dirty="0"/>
           </a:p>
         </p:txBody>
       </p:sp>
@@ -5238,8 +5216,8 @@
         </p:nvSpPr>
         <p:spPr>
           <a:xfrm>
-            <a:off x="594360" y="2907792"/>
-            <a:ext cx="292608" cy="292608"/>
+            <a:off x="594360" y="2679192"/>
+            <a:ext cx="310896" cy="310896"/>
           </a:xfrm>
           <a:prstGeom prst="rect">
             <a:avLst/>
@@ -5263,33 +5241,31 @@
         </p:nvSpPr>
         <p:spPr>
           <a:xfrm>
-            <a:off x="1051560" y="2834640"/>
-            <a:ext cx="5120640" cy="868680"/>
-          </a:xfrm>
-          <a:prstGeom prst="rect">
-            <a:avLst/>
-          </a:prstGeom>
-          <a:noFill/>
-          <a:ln/>
-        </p:spPr>
-        <p:txBody>
-          <a:bodyPr wrap="square" lIns="0" tIns="0" rIns="0" bIns="0" rtlCol="0" anchor="t">
-            <a:normAutofit/>
-          </a:bodyPr>
+            <a:off x="1097280" y="2606040"/>
+            <a:ext cx="10332720" cy="868680"/>
+          </a:xfrm>
+          <a:prstGeom prst="rect">
+            <a:avLst/>
+          </a:prstGeom>
+          <a:noFill/>
+          <a:ln/>
+        </p:spPr>
+        <p:txBody>
+          <a:bodyPr wrap="square" lIns="0" tIns="0" rIns="0" bIns="0" rtlCol="0" anchor="t"/>
           <a:lstStyle/>
           <a:p>
             <a:pPr indent="0" marL="0">
               <a:buNone/>
             </a:pPr>
             <a:r>
-              <a:rPr lang="en-US" sz="1600" dirty="0">
+              <a:rPr lang="en-US" sz="2000" dirty="0">
                 <a:solidFill>
                   <a:srgbClr val="141B26"/>
                 </a:solidFill>
               </a:rPr>
               <a:t>I can use data from a sample to estimate a population size and say how accurate the estimate is.</a:t>
             </a:r>
-            <a:endParaRPr lang="en-US" sz="1600" dirty="0"/>
+            <a:endParaRPr lang="en-US" sz="2000" dirty="0"/>
           </a:p>
         </p:txBody>
       </p:sp>
@@ -5301,8 +5277,8 @@
         </p:nvSpPr>
         <p:spPr>
           <a:xfrm>
-            <a:off x="6583680" y="1325880"/>
-            <a:ext cx="5029200" cy="457200"/>
+            <a:off x="548640" y="3611880"/>
+            <a:ext cx="5486400" cy="411480"/>
           </a:xfrm>
           <a:prstGeom prst="rect">
             <a:avLst/>
@@ -5318,14 +5294,14 @@
               <a:buNone/>
             </a:pPr>
             <a:r>
-              <a:rPr lang="en-US" sz="2000" b="1" dirty="0">
+              <a:rPr lang="en-US" sz="2200" b="1" dirty="0">
                 <a:solidFill>
                   <a:srgbClr val="7B3A8E"/>
                 </a:solidFill>
               </a:rPr>
               <a:t>Key words today</a:t>
             </a:r>
-            <a:endParaRPr lang="en-US" sz="2000" dirty="0"/>
+            <a:endParaRPr lang="en-US" sz="2200" dirty="0"/>
           </a:p>
         </p:txBody>
       </p:sp>
@@ -5337,360 +5313,295 @@
         </p:nvSpPr>
         <p:spPr>
           <a:xfrm>
-            <a:off x="6583680" y="1874520"/>
-            <a:ext cx="5029200" cy="4023360"/>
-          </a:xfrm>
-          <a:prstGeom prst="rect">
-            <a:avLst/>
-          </a:prstGeom>
-          <a:noFill/>
-          <a:ln/>
-        </p:spPr>
-        <p:txBody>
-          <a:bodyPr wrap="square" lIns="0" tIns="0" rIns="0" bIns="0" rtlCol="0" anchor="t">
-            <a:normAutofit/>
-          </a:bodyPr>
+            <a:off x="548640" y="4069080"/>
+            <a:ext cx="3515258" cy="1920240"/>
+          </a:xfrm>
+          <a:prstGeom prst="rect">
+            <a:avLst/>
+          </a:prstGeom>
+          <a:noFill/>
+          <a:ln/>
+        </p:spPr>
+        <p:txBody>
+          <a:bodyPr wrap="square" lIns="0" tIns="0" rIns="0" bIns="0" rtlCol="0" anchor="t"/>
+          <a:lstStyle/>
+          <a:p>
+            <a:pPr marL="304800" indent="-304800">
+              <a:spcAft>
+                <a:spcPts val="600"/>
+              </a:spcAft>
+              <a:buSzPct val="100000"/>
+              <a:buChar char="•"/>
+            </a:pPr>
+            <a:r>
+              <a:rPr lang="en-US" sz="2100" b="1" dirty="0">
+                <a:solidFill>
+                  <a:srgbClr val="0F2A5F"/>
+                </a:solidFill>
+              </a:rPr>
+              <a:t>abundance</a:t>
+            </a:r>
+            <a:endParaRPr lang="en-US" sz="2100" dirty="0"/>
+          </a:p>
+          <a:p>
+            <a:pPr marL="304800" indent="-304800">
+              <a:spcAft>
+                <a:spcPts val="600"/>
+              </a:spcAft>
+              <a:buSzPct val="100000"/>
+              <a:buChar char="•"/>
+            </a:pPr>
+            <a:r>
+              <a:rPr lang="en-US" sz="2100" b="1" dirty="0">
+                <a:solidFill>
+                  <a:srgbClr val="0F2A5F"/>
+                </a:solidFill>
+              </a:rPr>
+              <a:t>distribution</a:t>
+            </a:r>
+            <a:endParaRPr lang="en-US" sz="2100" dirty="0"/>
+          </a:p>
+          <a:p>
+            <a:pPr marL="304800" indent="-304800">
+              <a:spcAft>
+                <a:spcPts val="600"/>
+              </a:spcAft>
+              <a:buSzPct val="100000"/>
+              <a:buChar char="•"/>
+            </a:pPr>
+            <a:r>
+              <a:rPr lang="en-US" sz="2100" b="1" dirty="0">
+                <a:solidFill>
+                  <a:srgbClr val="0F2A5F"/>
+                </a:solidFill>
+              </a:rPr>
+              <a:t>population</a:t>
+            </a:r>
+            <a:endParaRPr lang="en-US" sz="2100" dirty="0"/>
+          </a:p>
+          <a:p>
+            <a:pPr marL="304800" indent="-304800">
+              <a:spcAft>
+                <a:spcPts val="600"/>
+              </a:spcAft>
+              <a:buSzPct val="100000"/>
+              <a:buChar char="•"/>
+            </a:pPr>
+            <a:r>
+              <a:rPr lang="en-US" sz="2100" b="1" dirty="0">
+                <a:solidFill>
+                  <a:srgbClr val="0F2A5F"/>
+                </a:solidFill>
+              </a:rPr>
+              <a:t>sample</a:t>
+            </a:r>
+            <a:endParaRPr lang="en-US" sz="2100" dirty="0"/>
+          </a:p>
+        </p:txBody>
+      </p:sp>
+      <p:sp>
+        <p:nvSpPr>
+          <p:cNvPr id="12" name="Text 10"/>
+          <p:cNvSpPr txBox="1"/>
+          <p:nvPr/>
+        </p:nvSpPr>
+        <p:spPr>
+          <a:xfrm>
+            <a:off x="4338218" y="4069080"/>
+            <a:ext cx="3515258" cy="1920240"/>
+          </a:xfrm>
+          <a:prstGeom prst="rect">
+            <a:avLst/>
+          </a:prstGeom>
+          <a:noFill/>
+          <a:ln/>
+        </p:spPr>
+        <p:txBody>
+          <a:bodyPr wrap="square" lIns="0" tIns="0" rIns="0" bIns="0" rtlCol="0" anchor="t"/>
+          <a:lstStyle/>
+          <a:p>
+            <a:pPr marL="304800" indent="-304800">
+              <a:spcAft>
+                <a:spcPts val="600"/>
+              </a:spcAft>
+              <a:buSzPct val="100000"/>
+              <a:buChar char="•"/>
+            </a:pPr>
+            <a:r>
+              <a:rPr lang="en-US" sz="2100" b="1" dirty="0">
+                <a:solidFill>
+                  <a:srgbClr val="0F2A5F"/>
+                </a:solidFill>
+              </a:rPr>
+              <a:t>estimate</a:t>
+            </a:r>
+            <a:endParaRPr lang="en-US" sz="2100" dirty="0"/>
+          </a:p>
+          <a:p>
+            <a:pPr marL="304800" indent="-304800">
+              <a:spcAft>
+                <a:spcPts val="600"/>
+              </a:spcAft>
+              <a:buSzPct val="100000"/>
+              <a:buChar char="•"/>
+            </a:pPr>
+            <a:r>
+              <a:rPr lang="en-US" sz="2100" b="1" dirty="0">
+                <a:solidFill>
+                  <a:srgbClr val="0F2A5F"/>
+                </a:solidFill>
+              </a:rPr>
+              <a:t>quadrat</a:t>
+            </a:r>
+            <a:endParaRPr lang="en-US" sz="2100" dirty="0"/>
+          </a:p>
+          <a:p>
+            <a:pPr marL="304800" indent="-304800">
+              <a:spcAft>
+                <a:spcPts val="600"/>
+              </a:spcAft>
+              <a:buSzPct val="100000"/>
+              <a:buChar char="•"/>
+            </a:pPr>
+            <a:r>
+              <a:rPr lang="en-US" sz="2100" b="1" dirty="0">
+                <a:solidFill>
+                  <a:srgbClr val="0F2A5F"/>
+                </a:solidFill>
+              </a:rPr>
+              <a:t>transect</a:t>
+            </a:r>
+            <a:endParaRPr lang="en-US" sz="2100" dirty="0"/>
+          </a:p>
+          <a:p>
+            <a:pPr marL="304800" indent="-304800">
+              <a:spcAft>
+                <a:spcPts val="600"/>
+              </a:spcAft>
+              <a:buSzPct val="100000"/>
+              <a:buChar char="•"/>
+            </a:pPr>
+            <a:r>
+              <a:rPr lang="en-US" sz="2100" b="1" dirty="0">
+                <a:solidFill>
+                  <a:srgbClr val="0F2A5F"/>
+                </a:solidFill>
+              </a:rPr>
+              <a:t>pitfall trap</a:t>
+            </a:r>
+            <a:endParaRPr lang="en-US" sz="2100" dirty="0"/>
+          </a:p>
+        </p:txBody>
+      </p:sp>
+      <p:sp>
+        <p:nvSpPr>
+          <p:cNvPr id="13" name="Text 11"/>
+          <p:cNvSpPr txBox="1"/>
+          <p:nvPr/>
+        </p:nvSpPr>
+        <p:spPr>
+          <a:xfrm>
+            <a:off x="8127797" y="4069080"/>
+            <a:ext cx="3515258" cy="1920240"/>
+          </a:xfrm>
+          <a:prstGeom prst="rect">
+            <a:avLst/>
+          </a:prstGeom>
+          <a:noFill/>
+          <a:ln/>
+        </p:spPr>
+        <p:txBody>
+          <a:bodyPr wrap="square" lIns="0" tIns="0" rIns="0" bIns="0" rtlCol="0" anchor="t"/>
+          <a:lstStyle/>
+          <a:p>
+            <a:pPr marL="304800" indent="-304800">
+              <a:spcAft>
+                <a:spcPts val="600"/>
+              </a:spcAft>
+              <a:buSzPct val="100000"/>
+              <a:buChar char="•"/>
+            </a:pPr>
+            <a:r>
+              <a:rPr lang="en-US" sz="2200" b="1" dirty="0">
+                <a:solidFill>
+                  <a:srgbClr val="0F2A5F"/>
+                </a:solidFill>
+              </a:rPr>
+              <a:t>sweep net</a:t>
+            </a:r>
+            <a:endParaRPr lang="en-US" sz="2200" dirty="0"/>
+          </a:p>
+          <a:p>
+            <a:pPr marL="304800" indent="-304800">
+              <a:spcAft>
+                <a:spcPts val="600"/>
+              </a:spcAft>
+              <a:buSzPct val="100000"/>
+              <a:buChar char="•"/>
+            </a:pPr>
+            <a:r>
+              <a:rPr lang="en-US" sz="2200" b="1" dirty="0">
+                <a:solidFill>
+                  <a:srgbClr val="0F2A5F"/>
+                </a:solidFill>
+              </a:rPr>
+              <a:t>random</a:t>
+            </a:r>
+            <a:endParaRPr lang="en-US" sz="2200" dirty="0"/>
+          </a:p>
+          <a:p>
+            <a:pPr marL="304800" indent="-304800">
+              <a:spcAft>
+                <a:spcPts val="600"/>
+              </a:spcAft>
+              <a:buSzPct val="100000"/>
+              <a:buChar char="•"/>
+            </a:pPr>
+            <a:r>
+              <a:rPr lang="en-US" sz="2200" b="1" dirty="0">
+                <a:solidFill>
+                  <a:srgbClr val="0F2A5F"/>
+                </a:solidFill>
+              </a:rPr>
+              <a:t>biodiversity</a:t>
+            </a:r>
+            <a:endParaRPr lang="en-US" sz="2200" dirty="0"/>
+          </a:p>
+        </p:txBody>
+      </p:sp>
+      <p:sp>
+        <p:nvSpPr>
+          <p:cNvPr id="14" name="Text 12"/>
+          <p:cNvSpPr txBox="1"/>
+          <p:nvPr/>
+        </p:nvSpPr>
+        <p:spPr>
+          <a:xfrm>
+            <a:off x="548640" y="6035040"/>
+            <a:ext cx="10881360" cy="320040"/>
+          </a:xfrm>
+          <a:prstGeom prst="rect">
+            <a:avLst/>
+          </a:prstGeom>
+          <a:noFill/>
+          <a:ln/>
+        </p:spPr>
+        <p:txBody>
+          <a:bodyPr wrap="square" lIns="0" tIns="0" rIns="0" bIns="0" rtlCol="0" anchor="ctr"/>
           <a:lstStyle/>
           <a:p>
             <a:pPr indent="0" marL="0">
-              <a:spcAft>
-                <a:spcPts val="500"/>
-              </a:spcAft>
-              <a:buNone/>
-            </a:pPr>
-            <a:r>
-              <a:rPr lang="en-US" sz="1300" b="1" dirty="0">
-                <a:solidFill>
-                  <a:srgbClr val="0F2A5F"/>
-                </a:solidFill>
-              </a:rPr>
-              <a:t>abundance</a:t>
-            </a:r>
-            <a:pPr indent="0" marL="0">
-              <a:spcAft>
-                <a:spcPts val="500"/>
-              </a:spcAft>
-              <a:buNone/>
-            </a:pPr>
-            <a:r>
-              <a:rPr lang="en-US" sz="1300" dirty="0">
-                <a:solidFill>
-                  <a:srgbClr val="141B26"/>
-                </a:solidFill>
-              </a:rPr>
-              <a:t>  how common a species is in a habitat</a:t>
-            </a:r>
-            <a:endParaRPr lang="en-US" sz="1300" dirty="0"/>
-          </a:p>
-          <a:p>
-            <a:pPr indent="0" marL="0">
-              <a:spcAft>
-                <a:spcPts val="500"/>
-              </a:spcAft>
-              <a:buNone/>
-            </a:pPr>
-            <a:r>
-              <a:rPr lang="en-US" sz="1300" b="1" dirty="0">
-                <a:solidFill>
-                  <a:srgbClr val="0F2A5F"/>
-                </a:solidFill>
-              </a:rPr>
-              <a:t>distribution</a:t>
-            </a:r>
-            <a:pPr indent="0" marL="0">
-              <a:spcAft>
-                <a:spcPts val="500"/>
-              </a:spcAft>
-              <a:buNone/>
-            </a:pPr>
-            <a:r>
-              <a:rPr lang="en-US" sz="1300" dirty="0">
-                <a:solidFill>
-                  <a:srgbClr val="141B26"/>
-                </a:solidFill>
-              </a:rPr>
-              <a:t>  how organisms are spread out in an area</a:t>
-            </a:r>
-            <a:endParaRPr lang="en-US" sz="1300" dirty="0"/>
-          </a:p>
-          <a:p>
-            <a:pPr indent="0" marL="0">
-              <a:spcAft>
-                <a:spcPts val="500"/>
-              </a:spcAft>
-              <a:buNone/>
-            </a:pPr>
-            <a:r>
-              <a:rPr lang="en-US" sz="1300" b="1" dirty="0">
-                <a:solidFill>
-                  <a:srgbClr val="0F2A5F"/>
-                </a:solidFill>
-              </a:rPr>
-              <a:t>population</a:t>
-            </a:r>
-            <a:pPr indent="0" marL="0">
-              <a:spcAft>
-                <a:spcPts val="500"/>
-              </a:spcAft>
-              <a:buNone/>
-            </a:pPr>
-            <a:r>
-              <a:rPr lang="en-US" sz="1300" dirty="0">
-                <a:solidFill>
-                  <a:srgbClr val="141B26"/>
-                </a:solidFill>
-              </a:rPr>
-              <a:t>  all the organisms of one species in an area</a:t>
-            </a:r>
-            <a:endParaRPr lang="en-US" sz="1300" dirty="0"/>
-          </a:p>
-          <a:p>
-            <a:pPr indent="0" marL="0">
-              <a:spcAft>
-                <a:spcPts val="500"/>
-              </a:spcAft>
-              <a:buNone/>
-            </a:pPr>
-            <a:r>
-              <a:rPr lang="en-US" sz="1300" b="1" dirty="0">
-                <a:solidFill>
-                  <a:srgbClr val="0F2A5F"/>
-                </a:solidFill>
-              </a:rPr>
-              <a:t>sample</a:t>
-            </a:r>
-            <a:pPr indent="0" marL="0">
-              <a:spcAft>
-                <a:spcPts val="500"/>
-              </a:spcAft>
-              <a:buNone/>
-            </a:pPr>
-            <a:r>
-              <a:rPr lang="en-US" sz="1300" dirty="0">
-                <a:solidFill>
-                  <a:srgbClr val="141B26"/>
-                </a:solidFill>
-              </a:rPr>
-              <a:t>  a small selected part of the total number</a:t>
-            </a:r>
-            <a:endParaRPr lang="en-US" sz="1300" dirty="0"/>
-          </a:p>
-          <a:p>
-            <a:pPr indent="0" marL="0">
-              <a:spcAft>
-                <a:spcPts val="500"/>
-              </a:spcAft>
-              <a:buNone/>
-            </a:pPr>
-            <a:r>
-              <a:rPr lang="en-US" sz="1300" b="1" dirty="0">
-                <a:solidFill>
-                  <a:srgbClr val="0F2A5F"/>
-                </a:solidFill>
-              </a:rPr>
-              <a:t>estimate</a:t>
-            </a:r>
-            <a:pPr indent="0" marL="0">
-              <a:spcAft>
-                <a:spcPts val="500"/>
-              </a:spcAft>
-              <a:buNone/>
-            </a:pPr>
-            <a:r>
-              <a:rPr lang="en-US" sz="1300" dirty="0">
-                <a:solidFill>
-                  <a:srgbClr val="141B26"/>
-                </a:solidFill>
-              </a:rPr>
-              <a:t>  an approximate calculation of something</a:t>
-            </a:r>
-            <a:endParaRPr lang="en-US" sz="1300" dirty="0"/>
-          </a:p>
-          <a:p>
-            <a:pPr indent="0" marL="0">
-              <a:spcAft>
-                <a:spcPts val="500"/>
-              </a:spcAft>
-              <a:buNone/>
-            </a:pPr>
-            <a:r>
-              <a:rPr lang="en-US" sz="1300" b="1" dirty="0">
-                <a:solidFill>
-                  <a:srgbClr val="0F2A5F"/>
-                </a:solidFill>
-              </a:rPr>
-              <a:t>quadrat</a:t>
-            </a:r>
-            <a:pPr indent="0" marL="0">
-              <a:spcAft>
-                <a:spcPts val="500"/>
-              </a:spcAft>
-              <a:buNone/>
-            </a:pPr>
-            <a:r>
-              <a:rPr lang="en-US" sz="1300" dirty="0">
-                <a:solidFill>
-                  <a:srgbClr val="141B26"/>
-                </a:solidFill>
-              </a:rPr>
-              <a:t>  a square frame used to sample plants or slow-moving animals</a:t>
-            </a:r>
-            <a:endParaRPr lang="en-US" sz="1300" dirty="0"/>
-          </a:p>
-          <a:p>
-            <a:pPr indent="0" marL="0">
-              <a:spcAft>
-                <a:spcPts val="500"/>
-              </a:spcAft>
-              <a:buNone/>
-            </a:pPr>
-            <a:r>
-              <a:rPr lang="en-US" sz="1300" b="1" dirty="0">
-                <a:solidFill>
-                  <a:srgbClr val="0F2A5F"/>
-                </a:solidFill>
-              </a:rPr>
-              <a:t>transect</a:t>
-            </a:r>
-            <a:pPr indent="0" marL="0">
-              <a:spcAft>
-                <a:spcPts val="500"/>
-              </a:spcAft>
-              <a:buNone/>
-            </a:pPr>
-            <a:r>
-              <a:rPr lang="en-US" sz="1300" dirty="0">
-                <a:solidFill>
-                  <a:srgbClr val="141B26"/>
-                </a:solidFill>
-              </a:rPr>
-              <a:t>  a line along which samples are taken</a:t>
-            </a:r>
-            <a:endParaRPr lang="en-US" sz="1300" dirty="0"/>
-          </a:p>
-          <a:p>
-            <a:pPr indent="0" marL="0">
-              <a:spcAft>
-                <a:spcPts val="500"/>
-              </a:spcAft>
-              <a:buNone/>
-            </a:pPr>
-            <a:r>
-              <a:rPr lang="en-US" sz="1300" b="1" dirty="0">
-                <a:solidFill>
-                  <a:srgbClr val="0F2A5F"/>
-                </a:solidFill>
-              </a:rPr>
-              <a:t>pitfall trap</a:t>
-            </a:r>
-            <a:pPr indent="0" marL="0">
-              <a:spcAft>
-                <a:spcPts val="500"/>
-              </a:spcAft>
-              <a:buNone/>
-            </a:pPr>
-            <a:r>
-              <a:rPr lang="en-US" sz="1300" dirty="0">
-                <a:solidFill>
-                  <a:srgbClr val="141B26"/>
-                </a:solidFill>
-              </a:rPr>
-              <a:t>  a container sunk into the ground to catch small ground animals</a:t>
-            </a:r>
-            <a:endParaRPr lang="en-US" sz="1300" dirty="0"/>
-          </a:p>
-          <a:p>
-            <a:pPr indent="0" marL="0">
-              <a:spcAft>
-                <a:spcPts val="500"/>
-              </a:spcAft>
-              <a:buNone/>
-            </a:pPr>
-            <a:r>
-              <a:rPr lang="en-US" sz="1300" b="1" dirty="0">
-                <a:solidFill>
-                  <a:srgbClr val="0F2A5F"/>
-                </a:solidFill>
-              </a:rPr>
-              <a:t>sweep net</a:t>
-            </a:r>
-            <a:pPr indent="0" marL="0">
-              <a:spcAft>
-                <a:spcPts val="500"/>
-              </a:spcAft>
-              <a:buNone/>
-            </a:pPr>
-            <a:r>
-              <a:rPr lang="en-US" sz="1300" dirty="0">
-                <a:solidFill>
-                  <a:srgbClr val="141B26"/>
-                </a:solidFill>
-              </a:rPr>
-              <a:t>  a net swept through long grass to catch insects</a:t>
-            </a:r>
-            <a:endParaRPr lang="en-US" sz="1300" dirty="0"/>
-          </a:p>
-          <a:p>
-            <a:pPr indent="0" marL="0">
-              <a:spcAft>
-                <a:spcPts val="500"/>
-              </a:spcAft>
-              <a:buNone/>
-            </a:pPr>
-            <a:r>
-              <a:rPr lang="en-US" sz="1300" b="1" dirty="0">
-                <a:solidFill>
-                  <a:srgbClr val="0F2A5F"/>
-                </a:solidFill>
-              </a:rPr>
-              <a:t>random</a:t>
-            </a:r>
-            <a:pPr indent="0" marL="0">
-              <a:spcAft>
-                <a:spcPts val="500"/>
-              </a:spcAft>
-              <a:buNone/>
-            </a:pPr>
-            <a:r>
-              <a:rPr lang="en-US" sz="1300" dirty="0">
-                <a:solidFill>
-                  <a:srgbClr val="141B26"/>
-                </a:solidFill>
-              </a:rPr>
-              <a:t>  chosen by chance, not by the person</a:t>
-            </a:r>
-            <a:endParaRPr lang="en-US" sz="1300" dirty="0"/>
-          </a:p>
-          <a:p>
-            <a:pPr indent="0" marL="0">
-              <a:spcAft>
-                <a:spcPts val="500"/>
-              </a:spcAft>
-              <a:buNone/>
-            </a:pPr>
-            <a:r>
-              <a:rPr lang="en-US" sz="1300" b="1" dirty="0">
-                <a:solidFill>
-                  <a:srgbClr val="0F2A5F"/>
-                </a:solidFill>
-              </a:rPr>
-              <a:t>biodiversity</a:t>
-            </a:r>
-            <a:pPr indent="0" marL="0">
-              <a:spcAft>
-                <a:spcPts val="500"/>
-              </a:spcAft>
-              <a:buNone/>
-            </a:pPr>
-            <a:r>
-              <a:rPr lang="en-US" sz="1300" dirty="0">
-                <a:solidFill>
-                  <a:srgbClr val="141B26"/>
-                </a:solidFill>
-              </a:rPr>
-              <a:t>  the number of different species in an area</a:t>
-            </a:r>
-            <a:endParaRPr lang="en-US" sz="1300" dirty="0"/>
+              <a:buNone/>
+            </a:pPr>
+            <a:r>
+              <a:rPr lang="en-US" sz="1400" i="1" dirty="0">
+                <a:solidFill>
+                  <a:srgbClr val="5B6574"/>
+                </a:solidFill>
+              </a:rPr>
+              <a:t>Meanings are in the key words box on your worksheet.</a:t>
+            </a:r>
+            <a:endParaRPr lang="en-US" sz="1400" dirty="0"/>
           </a:p>
         </p:txBody>
       </p:sp>
@@ -5874,32 +5785,30 @@
         <p:spPr>
           <a:xfrm>
             <a:off x="548640" y="1371600"/>
-            <a:ext cx="5394960" cy="2377440"/>
-          </a:xfrm>
-          <a:prstGeom prst="rect">
-            <a:avLst/>
-          </a:prstGeom>
-          <a:noFill/>
-          <a:ln/>
-        </p:spPr>
-        <p:txBody>
-          <a:bodyPr wrap="square" lIns="0" tIns="0" rIns="0" bIns="0" rtlCol="0" anchor="t">
-            <a:normAutofit/>
-          </a:bodyPr>
+            <a:ext cx="5394960" cy="2651760"/>
+          </a:xfrm>
+          <a:prstGeom prst="rect">
+            <a:avLst/>
+          </a:prstGeom>
+          <a:noFill/>
+          <a:ln/>
+        </p:spPr>
+        <p:txBody>
+          <a:bodyPr wrap="square" lIns="0" tIns="0" rIns="0" bIns="0" rtlCol="0" anchor="t"/>
           <a:lstStyle/>
           <a:p>
             <a:pPr indent="0" marL="0">
               <a:buNone/>
             </a:pPr>
             <a:r>
-              <a:rPr lang="en-US" sz="2800" b="1" dirty="0">
+              <a:rPr lang="en-US" sz="2900" b="1" dirty="0">
                 <a:solidFill>
                   <a:srgbClr val="0F2A5F"/>
                 </a:solidFill>
               </a:rPr>
               <a:t>Some lions move into an area where gazelles live. What will happen to the gazelle population, and how could an ecologist find out how many gazelles are left?</a:t>
             </a:r>
-            <a:endParaRPr lang="en-US" sz="2800" dirty="0"/>
+            <a:endParaRPr lang="en-US" sz="2900" dirty="0"/>
           </a:p>
         </p:txBody>
       </p:sp>
@@ -5911,19 +5820,17 @@
         </p:nvSpPr>
         <p:spPr>
           <a:xfrm>
-            <a:off x="548640" y="3794760"/>
-            <a:ext cx="5394960" cy="2103120"/>
-          </a:xfrm>
-          <a:prstGeom prst="rect">
-            <a:avLst/>
-          </a:prstGeom>
-          <a:noFill/>
-          <a:ln/>
-        </p:spPr>
-        <p:txBody>
-          <a:bodyPr wrap="square" lIns="0" tIns="0" rIns="0" bIns="0" rtlCol="0" anchor="t">
-            <a:normAutofit/>
-          </a:bodyPr>
+            <a:off x="548640" y="4114800"/>
+            <a:ext cx="5394960" cy="1828800"/>
+          </a:xfrm>
+          <a:prstGeom prst="rect">
+            <a:avLst/>
+          </a:prstGeom>
+          <a:noFill/>
+          <a:ln/>
+        </p:spPr>
+        <p:txBody>
+          <a:bodyPr wrap="square" lIns="0" tIns="0" rIns="0" bIns="0" rtlCol="0" anchor="t"/>
           <a:lstStyle/>
           <a:p>
             <a:pPr indent="0" marL="0">
@@ -5933,14 +5840,14 @@
               <a:buNone/>
             </a:pPr>
             <a:r>
-              <a:rPr lang="en-US" sz="1600" dirty="0">
+              <a:rPr lang="en-US" sz="2000" dirty="0">
                 <a:solidFill>
                   <a:srgbClr val="141B26"/>
                 </a:solidFill>
               </a:rPr>
               <a:t>Talk to a partner: you cannot count every gazelle. What could you do instead?</a:t>
             </a:r>
-            <a:endParaRPr lang="en-US" sz="1600" dirty="0"/>
+            <a:endParaRPr lang="en-US" sz="2000" dirty="0"/>
           </a:p>
         </p:txBody>
       </p:sp>
@@ -5977,7 +5884,7 @@
         <p:spPr>
           <a:xfrm>
             <a:off x="6309360" y="5200293"/>
-            <a:ext cx="5303520" cy="502920"/>
+            <a:ext cx="5303520" cy="548640"/>
           </a:xfrm>
           <a:prstGeom prst="rect">
             <a:avLst/>
@@ -5993,7 +5900,7 @@
               <a:buNone/>
             </a:pPr>
             <a:r>
-              <a:rPr lang="en-US" sz="1100" dirty="0">
+              <a:rPr lang="en-US" sz="1300" dirty="0">
                 <a:solidFill>
                   <a:srgbClr val="141B26"/>
                 </a:solidFill>
@@ -6003,21 +5910,21 @@
             <a:pPr algn="l" indent="0" marL="0">
               <a:buNone/>
             </a:pPr>
-            <a:endParaRPr lang="en-US" sz="1100" dirty="0"/>
+            <a:endParaRPr lang="en-US" sz="1300" dirty="0"/>
           </a:p>
           <a:p>
             <a:pPr algn="l" indent="0" marL="0">
               <a:buNone/>
             </a:pPr>
             <a:r>
-              <a:rPr lang="en-US" sz="800" dirty="0">
+              <a:rPr lang="en-US" sz="900" dirty="0">
                 <a:solidFill>
                   <a:srgbClr val="5B6574"/>
                 </a:solidFill>
               </a:rPr>
               <a:t>Image: FamilyRalph, CC BY 2.0, via Wikimedia Commons</a:t>
             </a:r>
-            <a:endParaRPr lang="en-US" sz="1100" dirty="0"/>
+            <a:endParaRPr lang="en-US" sz="1300" dirty="0"/>
           </a:p>
         </p:txBody>
       </p:sp>
@@ -6200,8 +6107,8 @@
         </p:nvSpPr>
         <p:spPr>
           <a:xfrm>
-            <a:off x="548640" y="6053328"/>
-            <a:ext cx="9601200" cy="292608"/>
+            <a:off x="548640" y="6035040"/>
+            <a:ext cx="9601200" cy="310896"/>
           </a:xfrm>
           <a:prstGeom prst="rect">
             <a:avLst/>
@@ -6217,7 +6124,7 @@
               <a:buNone/>
             </a:pPr>
             <a:r>
-              <a:rPr lang="en-US" sz="1200" b="1" dirty="0">
+              <a:rPr lang="en-US" sz="1400" b="1" dirty="0">
                 <a:solidFill>
                   <a:srgbClr val="7B3A8E"/>
                 </a:solidFill>
@@ -6228,14 +6135,14 @@
               <a:buNone/>
             </a:pPr>
             <a:r>
-              <a:rPr lang="en-US" sz="1200" dirty="0">
+              <a:rPr lang="en-US" sz="1400" dirty="0">
                 <a:solidFill>
                   <a:srgbClr val="7B3A8E"/>
                 </a:solidFill>
               </a:rPr>
               <a:t>abundance   ·   sample   ·   quadrat   ·   pitfall trap   ·   sweep net</a:t>
             </a:r>
-            <a:endParaRPr lang="en-US" sz="1200" dirty="0"/>
+            <a:endParaRPr lang="en-US" sz="1400" dirty="0"/>
           </a:p>
         </p:txBody>
       </p:sp>
@@ -6257,63 +6164,61 @@
           <a:ln/>
         </p:spPr>
         <p:txBody>
-          <a:bodyPr wrap="square" lIns="0" tIns="0" rIns="0" bIns="0" rtlCol="0" anchor="t">
-            <a:normAutofit/>
-          </a:bodyPr>
-          <a:lstStyle/>
-          <a:p>
-            <a:pPr marL="228600" indent="-228600">
+          <a:bodyPr wrap="square" lIns="0" tIns="0" rIns="0" bIns="0" rtlCol="0" anchor="t"/>
+          <a:lstStyle/>
+          <a:p>
+            <a:pPr marL="304800" indent="-304800">
               <a:spcAft>
-                <a:spcPts val="600"/>
+                <a:spcPts val="800"/>
               </a:spcAft>
               <a:buSzPct val="100000"/>
               <a:buChar char="•"/>
             </a:pPr>
             <a:r>
-              <a:rPr lang="en-US" sz="1700" dirty="0">
+              <a:rPr lang="en-US" sz="2000" dirty="0">
                 <a:solidFill>
                   <a:srgbClr val="141B26"/>
                 </a:solidFill>
               </a:rPr>
               <a:t>Abundance is how common a species is in a habitat. It depends on abiotic factors (temperature, rainfall) and biotic factors (predation, competition).</a:t>
             </a:r>
-            <a:endParaRPr lang="en-US" sz="1700" dirty="0"/>
-          </a:p>
-          <a:p>
-            <a:pPr marL="228600" indent="-228600">
+            <a:endParaRPr lang="en-US" sz="2000" dirty="0"/>
+          </a:p>
+          <a:p>
+            <a:pPr marL="304800" indent="-304800">
               <a:spcAft>
-                <a:spcPts val="600"/>
+                <a:spcPts val="800"/>
               </a:spcAft>
               <a:buSzPct val="100000"/>
               <a:buChar char="•"/>
             </a:pPr>
             <a:r>
-              <a:rPr lang="en-US" sz="1700" dirty="0">
+              <a:rPr lang="en-US" sz="2000" dirty="0">
                 <a:solidFill>
                   <a:srgbClr val="141B26"/>
                 </a:solidFill>
               </a:rPr>
               <a:t>You can rarely count every organism, so you take samples to estimate the population size.</a:t>
             </a:r>
-            <a:endParaRPr lang="en-US" sz="1700" dirty="0"/>
-          </a:p>
-          <a:p>
-            <a:pPr marL="228600" indent="-228600">
+            <a:endParaRPr lang="en-US" sz="2000" dirty="0"/>
+          </a:p>
+          <a:p>
+            <a:pPr marL="304800" indent="-304800">
               <a:spcAft>
-                <a:spcPts val="600"/>
+                <a:spcPts val="800"/>
               </a:spcAft>
               <a:buSzPct val="100000"/>
               <a:buChar char="•"/>
             </a:pPr>
             <a:r>
-              <a:rPr lang="en-US" sz="1700" dirty="0">
+              <a:rPr lang="en-US" sz="2000" dirty="0">
                 <a:solidFill>
                   <a:srgbClr val="141B26"/>
                 </a:solidFill>
               </a:rPr>
               <a:t>Quadrat: plants and slow-moving animals. Pitfall trap: ground beetles. Sweep net: insects in long grass. Pooter: small insects.</a:t>
             </a:r>
-            <a:endParaRPr lang="en-US" sz="1700" dirty="0"/>
+            <a:endParaRPr lang="en-US" sz="2000" dirty="0"/>
           </a:p>
         </p:txBody>
       </p:sp>
@@ -6360,16 +6265,14 @@
           <a:ln/>
         </p:spPr>
         <p:txBody>
-          <a:bodyPr wrap="square" lIns="0" tIns="0" rIns="0" bIns="0" rtlCol="0" anchor="ctr">
-            <a:normAutofit/>
-          </a:bodyPr>
+          <a:bodyPr wrap="square" lIns="0" tIns="0" rIns="0" bIns="0" rtlCol="0" anchor="ctr"/>
           <a:lstStyle/>
           <a:p>
             <a:pPr indent="0" marL="0">
               <a:buNone/>
             </a:pPr>
             <a:r>
-              <a:rPr lang="en-US" sz="1400" b="1" dirty="0">
+              <a:rPr lang="en-US" sz="1700" b="1" dirty="0">
                 <a:solidFill>
                   <a:srgbClr val="7B3A8E"/>
                 </a:solidFill>
@@ -6380,14 +6283,14 @@
               <a:buNone/>
             </a:pPr>
             <a:r>
-              <a:rPr lang="en-US" sz="1400" dirty="0">
+              <a:rPr lang="en-US" sz="1700" dirty="0">
                 <a:solidFill>
                   <a:srgbClr val="141B26"/>
                 </a:solidFill>
               </a:rPr>
               <a:t>Choose the method that suits the organism, then sample.</a:t>
             </a:r>
-            <a:endParaRPr lang="en-US" sz="1400" dirty="0"/>
+            <a:endParaRPr lang="en-US" sz="1700" dirty="0"/>
           </a:p>
         </p:txBody>
       </p:sp>
@@ -6587,14 +6490,14 @@
               <a:buNone/>
             </a:pPr>
             <a:r>
-              <a:rPr lang="en-US" sz="1600" dirty="0">
+              <a:rPr lang="en-US" sz="1800" dirty="0">
                 <a:solidFill>
                   <a:srgbClr val="141B26"/>
                 </a:solidFill>
               </a:rPr>
               <a:t>Count the organisms in several quadrats, then scale up to the whole area.</a:t>
             </a:r>
-            <a:endParaRPr lang="en-US" sz="1600" dirty="0"/>
+            <a:endParaRPr lang="en-US" sz="1800" dirty="0"/>
           </a:p>
         </p:txBody>
       </p:sp>
@@ -6665,16 +6568,14 @@
           <a:ln/>
         </p:spPr>
         <p:txBody>
-          <a:bodyPr wrap="square" lIns="0" tIns="0" rIns="0" bIns="0" rtlCol="0" anchor="ctr">
-            <a:normAutofit/>
-          </a:bodyPr>
+          <a:bodyPr wrap="square" lIns="0" tIns="0" rIns="0" bIns="0" rtlCol="0" anchor="ctr"/>
           <a:lstStyle/>
           <a:p>
             <a:pPr indent="0" marL="0">
               <a:buNone/>
             </a:pPr>
             <a:r>
-              <a:rPr lang="en-US" sz="1400" b="1" dirty="0">
+              <a:rPr lang="en-US" sz="1700" b="1" dirty="0">
                 <a:solidFill>
                   <a:srgbClr val="7B3A8E"/>
                 </a:solidFill>
@@ -6685,14 +6586,14 @@
               <a:buNone/>
             </a:pPr>
             <a:r>
-              <a:rPr lang="en-US" sz="1400" dirty="0">
+              <a:rPr lang="en-US" sz="1700" dirty="0">
                 <a:solidFill>
                   <a:srgbClr val="141B26"/>
                 </a:solidFill>
               </a:rPr>
               <a:t>population size = number counted in the sample x total area of the habitat / area sampled</a:t>
             </a:r>
-            <a:endParaRPr lang="en-US" sz="1400" dirty="0"/>
+            <a:endParaRPr lang="en-US" sz="1700" dirty="0"/>
           </a:p>
         </p:txBody>
       </p:sp>
@@ -6875,8 +6776,8 @@
         </p:nvSpPr>
         <p:spPr>
           <a:xfrm>
-            <a:off x="548640" y="6053328"/>
-            <a:ext cx="9601200" cy="292608"/>
+            <a:off x="548640" y="6035040"/>
+            <a:ext cx="9601200" cy="310896"/>
           </a:xfrm>
           <a:prstGeom prst="rect">
             <a:avLst/>
@@ -6892,7 +6793,7 @@
               <a:buNone/>
             </a:pPr>
             <a:r>
-              <a:rPr lang="en-US" sz="1200" b="1" dirty="0">
+              <a:rPr lang="en-US" sz="1400" b="1" dirty="0">
                 <a:solidFill>
                   <a:srgbClr val="7B3A8E"/>
                 </a:solidFill>
@@ -6903,14 +6804,14 @@
               <a:buNone/>
             </a:pPr>
             <a:r>
-              <a:rPr lang="en-US" sz="1200" dirty="0">
+              <a:rPr lang="en-US" sz="1400" dirty="0">
                 <a:solidFill>
                   <a:srgbClr val="7B3A8E"/>
                 </a:solidFill>
               </a:rPr>
               <a:t>estimate   ·   random</a:t>
             </a:r>
-            <a:endParaRPr lang="en-US" sz="1200" dirty="0"/>
+            <a:endParaRPr lang="en-US" sz="1400" dirty="0"/>
           </a:p>
         </p:txBody>
       </p:sp>
@@ -6932,63 +6833,61 @@
           <a:ln/>
         </p:spPr>
         <p:txBody>
-          <a:bodyPr wrap="square" lIns="0" tIns="0" rIns="0" bIns="0" rtlCol="0" anchor="t">
-            <a:normAutofit/>
-          </a:bodyPr>
-          <a:lstStyle/>
-          <a:p>
-            <a:pPr marL="228600" indent="-228600">
+          <a:bodyPr wrap="square" lIns="0" tIns="0" rIns="0" bIns="0" rtlCol="0" anchor="t"/>
+          <a:lstStyle/>
+          <a:p>
+            <a:pPr marL="304800" indent="-304800">
               <a:spcAft>
-                <a:spcPts val="600"/>
+                <a:spcPts val="800"/>
               </a:spcAft>
               <a:buSzPct val="100000"/>
               <a:buChar char="•"/>
             </a:pPr>
             <a:r>
-              <a:rPr lang="en-US" sz="1700" dirty="0">
+              <a:rPr lang="en-US" sz="2000" dirty="0">
                 <a:solidFill>
                   <a:srgbClr val="141B26"/>
                 </a:solidFill>
               </a:rPr>
               <a:t>Accuracy is how close the estimate is to the true value if every organism were counted.</a:t>
             </a:r>
-            <a:endParaRPr lang="en-US" sz="1700" dirty="0"/>
-          </a:p>
-          <a:p>
-            <a:pPr marL="228600" indent="-228600">
+            <a:endParaRPr lang="en-US" sz="2000" dirty="0"/>
+          </a:p>
+          <a:p>
+            <a:pPr marL="304800" indent="-304800">
               <a:spcAft>
-                <a:spcPts val="600"/>
+                <a:spcPts val="800"/>
               </a:spcAft>
               <a:buSzPct val="100000"/>
               <a:buChar char="•"/>
             </a:pPr>
             <a:r>
-              <a:rPr lang="en-US" sz="1700" dirty="0">
+              <a:rPr lang="en-US" sz="2000" dirty="0">
                 <a:solidFill>
                   <a:srgbClr val="141B26"/>
                 </a:solidFill>
               </a:rPr>
               <a:t>Estimates are more accurate when the sample is larger (but this takes longer), the organisms are easy to find, and they are spread out rather than clumped.</a:t>
             </a:r>
-            <a:endParaRPr lang="en-US" sz="1700" dirty="0"/>
-          </a:p>
-          <a:p>
-            <a:pPr marL="228600" indent="-228600">
+            <a:endParaRPr lang="en-US" sz="2000" dirty="0"/>
+          </a:p>
+          <a:p>
+            <a:pPr marL="304800" indent="-304800">
               <a:spcAft>
-                <a:spcPts val="600"/>
+                <a:spcPts val="800"/>
               </a:spcAft>
               <a:buSzPct val="100000"/>
               <a:buChar char="•"/>
             </a:pPr>
             <a:r>
-              <a:rPr lang="en-US" sz="1700" dirty="0">
+              <a:rPr lang="en-US" sz="2000" dirty="0">
                 <a:solidFill>
                   <a:srgbClr val="141B26"/>
                 </a:solidFill>
               </a:rPr>
               <a:t>Place quadrats at random, not where you expect to find most. Choosing the spots yourself causes bias.</a:t>
             </a:r>
-            <a:endParaRPr lang="en-US" sz="1700" dirty="0"/>
+            <a:endParaRPr lang="en-US" sz="2000" dirty="0"/>
           </a:p>
         </p:txBody>
       </p:sp>
@@ -7025,7 +6924,7 @@
         <p:spPr>
           <a:xfrm>
             <a:off x="6583680" y="4789293"/>
-            <a:ext cx="5029200" cy="502920"/>
+            <a:ext cx="5029200" cy="548640"/>
           </a:xfrm>
           <a:prstGeom prst="rect">
             <a:avLst/>
@@ -7041,7 +6940,7 @@
               <a:buNone/>
             </a:pPr>
             <a:r>
-              <a:rPr lang="en-US" sz="1100" dirty="0">
+              <a:rPr lang="en-US" sz="1300" dirty="0">
                 <a:solidFill>
                   <a:srgbClr val="141B26"/>
                 </a:solidFill>
@@ -7051,21 +6950,21 @@
             <a:pPr algn="l" indent="0" marL="0">
               <a:buNone/>
             </a:pPr>
-            <a:endParaRPr lang="en-US" sz="1100" dirty="0"/>
+            <a:endParaRPr lang="en-US" sz="1300" dirty="0"/>
           </a:p>
           <a:p>
             <a:pPr algn="l" indent="0" marL="0">
               <a:buNone/>
             </a:pPr>
             <a:r>
-              <a:rPr lang="en-US" sz="800" dirty="0">
+              <a:rPr lang="en-US" sz="900" dirty="0">
                 <a:solidFill>
                   <a:srgbClr val="5B6574"/>
                 </a:solidFill>
               </a:rPr>
               <a:t>Image: vic_burton, CC BY-SA 2.0, via Wikimedia Commons</a:t>
             </a:r>
-            <a:endParaRPr lang="en-US" sz="1100" dirty="0"/>
+            <a:endParaRPr lang="en-US" sz="1300" dirty="0"/>
           </a:p>
         </p:txBody>
       </p:sp>
@@ -7112,16 +7011,14 @@
           <a:ln/>
         </p:spPr>
         <p:txBody>
-          <a:bodyPr wrap="square" lIns="0" tIns="0" rIns="0" bIns="0" rtlCol="0" anchor="ctr">
-            <a:normAutofit/>
-          </a:bodyPr>
+          <a:bodyPr wrap="square" lIns="0" tIns="0" rIns="0" bIns="0" rtlCol="0" anchor="ctr"/>
           <a:lstStyle/>
           <a:p>
             <a:pPr indent="0" marL="0">
               <a:buNone/>
             </a:pPr>
             <a:r>
-              <a:rPr lang="en-US" sz="1400" b="1" dirty="0">
+              <a:rPr lang="en-US" sz="1700" b="1" dirty="0">
                 <a:solidFill>
                   <a:srgbClr val="7B3A8E"/>
                 </a:solidFill>
@@ -7132,14 +7029,14 @@
               <a:buNone/>
             </a:pPr>
             <a:r>
-              <a:rPr lang="en-US" sz="1400" dirty="0">
+              <a:rPr lang="en-US" sz="1700" dirty="0">
                 <a:solidFill>
                   <a:srgbClr val="141B26"/>
                 </a:solidFill>
               </a:rPr>
               <a:t>Random sampling avoids bias.</a:t>
             </a:r>
-            <a:endParaRPr lang="en-US" sz="1400" dirty="0"/>
+            <a:endParaRPr lang="en-US" sz="1700" dirty="0"/>
           </a:p>
         </p:txBody>
       </p:sp>
@@ -7339,14 +7236,14 @@
               <a:buNone/>
             </a:pPr>
             <a:r>
-              <a:rPr lang="en-US" sz="1600" dirty="0">
+              <a:rPr lang="en-US" sz="1500" dirty="0">
                 <a:solidFill>
                   <a:srgbClr val="141B26"/>
                 </a:solidFill>
               </a:rPr>
               <a:t>Distribution can be random, regular or clumped. When it is hard to see, scientists sample along a line: a transect.</a:t>
             </a:r>
-            <a:endParaRPr lang="en-US" sz="1600" dirty="0"/>
+            <a:endParaRPr lang="en-US" sz="1500" dirty="0"/>
           </a:p>
         </p:txBody>
       </p:sp>
@@ -7417,16 +7314,14 @@
           <a:ln/>
         </p:spPr>
         <p:txBody>
-          <a:bodyPr wrap="square" lIns="0" tIns="0" rIns="0" bIns="0" rtlCol="0" anchor="ctr">
-            <a:normAutofit/>
-          </a:bodyPr>
+          <a:bodyPr wrap="square" lIns="0" tIns="0" rIns="0" bIns="0" rtlCol="0" anchor="ctr"/>
           <a:lstStyle/>
           <a:p>
             <a:pPr indent="0" marL="0">
               <a:buNone/>
             </a:pPr>
             <a:r>
-              <a:rPr lang="en-US" sz="1400" b="1" dirty="0">
+              <a:rPr lang="en-US" sz="1700" b="1" dirty="0">
                 <a:solidFill>
                   <a:srgbClr val="7B3A8E"/>
                 </a:solidFill>
@@ -7437,14 +7332,14 @@
               <a:buNone/>
             </a:pPr>
             <a:r>
-              <a:rPr lang="en-US" sz="1400" dirty="0">
+              <a:rPr lang="en-US" sz="1700" dirty="0">
                 <a:solidFill>
                   <a:srgbClr val="141B26"/>
                 </a:solidFill>
               </a:rPr>
               <a:t>In a transect survey, an evenly distributed organism appears in every sample; a clumped one appears in only some.</a:t>
             </a:r>
-            <a:endParaRPr lang="en-US" sz="1400" dirty="0"/>
+            <a:endParaRPr lang="en-US" sz="1700" dirty="0"/>
           </a:p>
         </p:txBody>
       </p:sp>
@@ -7644,14 +7539,14 @@
               <a:buNone/>
             </a:pPr>
             <a:r>
-              <a:rPr lang="en-US" sz="1400" i="1" dirty="0">
+              <a:rPr lang="en-US" sz="1600" i="1" dirty="0">
                 <a:solidFill>
                   <a:srgbClr val="5B6574"/>
                 </a:solidFill>
               </a:rPr>
               <a:t>Mini whiteboards. One answer each, then we check.</a:t>
             </a:r>
-            <a:endParaRPr lang="en-US" sz="1400" dirty="0"/>
+            <a:endParaRPr lang="en-US" sz="1600" dirty="0"/>
           </a:p>
         </p:txBody>
       </p:sp>
@@ -7700,16 +7595,14 @@
           <a:ln/>
         </p:spPr>
         <p:txBody>
-          <a:bodyPr wrap="square" lIns="0" tIns="0" rIns="0" bIns="0" rtlCol="0" anchor="ctr">
-            <a:normAutofit/>
-          </a:bodyPr>
+          <a:bodyPr wrap="square" lIns="0" tIns="0" rIns="0" bIns="0" rtlCol="0" anchor="ctr"/>
           <a:lstStyle/>
           <a:p>
             <a:pPr indent="0" marL="0">
               <a:buNone/>
             </a:pPr>
             <a:r>
-              <a:rPr lang="en-US" sz="1600" b="1" dirty="0">
+              <a:rPr lang="en-US" sz="2000" b="1" dirty="0">
                 <a:solidFill>
                   <a:srgbClr val="7B3A8E"/>
                 </a:solidFill>
@@ -7720,14 +7613,14 @@
               <a:buNone/>
             </a:pPr>
             <a:r>
-              <a:rPr lang="en-US" sz="1600" dirty="0">
+              <a:rPr lang="en-US" sz="2000" dirty="0">
                 <a:solidFill>
                   <a:srgbClr val="141B26"/>
                 </a:solidFill>
               </a:rPr>
               <a:t>What is abundance?</a:t>
             </a:r>
-            <a:endParaRPr lang="en-US" sz="1600" dirty="0"/>
+            <a:endParaRPr lang="en-US" sz="2000" dirty="0"/>
           </a:p>
         </p:txBody>
       </p:sp>
@@ -7776,16 +7669,14 @@
           <a:ln/>
         </p:spPr>
         <p:txBody>
-          <a:bodyPr wrap="square" lIns="0" tIns="0" rIns="0" bIns="0" rtlCol="0" anchor="ctr">
-            <a:normAutofit/>
-          </a:bodyPr>
+          <a:bodyPr wrap="square" lIns="0" tIns="0" rIns="0" bIns="0" rtlCol="0" anchor="ctr"/>
           <a:lstStyle/>
           <a:p>
             <a:pPr indent="0" marL="0">
               <a:buNone/>
             </a:pPr>
             <a:r>
-              <a:rPr lang="en-US" sz="1600" b="1" dirty="0">
+              <a:rPr lang="en-US" sz="2000" b="1" dirty="0">
                 <a:solidFill>
                   <a:srgbClr val="7B3A8E"/>
                 </a:solidFill>
@@ -7796,14 +7687,14 @@
               <a:buNone/>
             </a:pPr>
             <a:r>
-              <a:rPr lang="en-US" sz="1600" dirty="0">
+              <a:rPr lang="en-US" sz="2000" dirty="0">
                 <a:solidFill>
                   <a:srgbClr val="141B26"/>
                 </a:solidFill>
               </a:rPr>
               <a:t>Which method would you use to sample ground beetles?</a:t>
             </a:r>
-            <a:endParaRPr lang="en-US" sz="1600" dirty="0"/>
+            <a:endParaRPr lang="en-US" sz="2000" dirty="0"/>
           </a:p>
         </p:txBody>
       </p:sp>
@@ -7852,16 +7743,14 @@
           <a:ln/>
         </p:spPr>
         <p:txBody>
-          <a:bodyPr wrap="square" lIns="0" tIns="0" rIns="0" bIns="0" rtlCol="0" anchor="ctr">
-            <a:normAutofit/>
-          </a:bodyPr>
+          <a:bodyPr wrap="square" lIns="0" tIns="0" rIns="0" bIns="0" rtlCol="0" anchor="ctr"/>
           <a:lstStyle/>
           <a:p>
             <a:pPr indent="0" marL="0">
               <a:buNone/>
             </a:pPr>
             <a:r>
-              <a:rPr lang="en-US" sz="1600" b="1" dirty="0">
+              <a:rPr lang="en-US" sz="2000" b="1" dirty="0">
                 <a:solidFill>
                   <a:srgbClr val="7B3A8E"/>
                 </a:solidFill>
@@ -7872,14 +7761,14 @@
               <a:buNone/>
             </a:pPr>
             <a:r>
-              <a:rPr lang="en-US" sz="1600" dirty="0">
+              <a:rPr lang="en-US" sz="2000" dirty="0">
                 <a:solidFill>
                   <a:srgbClr val="141B26"/>
                 </a:solidFill>
               </a:rPr>
               <a:t>3 crabs in a 0.25 m2 quadrat; the rocks cover 600 m2. Estimate the crab population.</a:t>
             </a:r>
-            <a:endParaRPr lang="en-US" sz="1600" dirty="0"/>
+            <a:endParaRPr lang="en-US" sz="2000" dirty="0"/>
           </a:p>
         </p:txBody>
       </p:sp>
@@ -7928,16 +7817,14 @@
           <a:ln/>
         </p:spPr>
         <p:txBody>
-          <a:bodyPr wrap="square" lIns="0" tIns="0" rIns="0" bIns="0" rtlCol="0" anchor="ctr">
-            <a:normAutofit/>
-          </a:bodyPr>
+          <a:bodyPr wrap="square" lIns="0" tIns="0" rIns="0" bIns="0" rtlCol="0" anchor="ctr"/>
           <a:lstStyle/>
           <a:p>
             <a:pPr indent="0" marL="0">
               <a:buNone/>
             </a:pPr>
             <a:r>
-              <a:rPr lang="en-US" sz="1600" b="1" dirty="0">
+              <a:rPr lang="en-US" sz="2000" b="1" dirty="0">
                 <a:solidFill>
                   <a:srgbClr val="7B3A8E"/>
                 </a:solidFill>
@@ -7948,14 +7835,14 @@
               <a:buNone/>
             </a:pPr>
             <a:r>
-              <a:rPr lang="en-US" sz="1600" dirty="0">
+              <a:rPr lang="en-US" sz="2000" dirty="0">
                 <a:solidFill>
                   <a:srgbClr val="141B26"/>
                 </a:solidFill>
               </a:rPr>
               <a:t>How should you decide where to put your quadrats?</a:t>
             </a:r>
-            <a:endParaRPr lang="en-US" sz="1600" dirty="0"/>
+            <a:endParaRPr lang="en-US" sz="2000" dirty="0"/>
           </a:p>
         </p:txBody>
       </p:sp>
@@ -8004,16 +7891,14 @@
           <a:ln/>
         </p:spPr>
         <p:txBody>
-          <a:bodyPr wrap="square" lIns="0" tIns="0" rIns="0" bIns="0" rtlCol="0" anchor="ctr">
-            <a:normAutofit/>
-          </a:bodyPr>
+          <a:bodyPr wrap="square" lIns="0" tIns="0" rIns="0" bIns="0" rtlCol="0" anchor="ctr"/>
           <a:lstStyle/>
           <a:p>
             <a:pPr indent="0" marL="0">
               <a:buNone/>
             </a:pPr>
             <a:r>
-              <a:rPr lang="en-US" sz="1600" b="1" dirty="0">
+              <a:rPr lang="en-US" sz="2000" b="1" dirty="0">
                 <a:solidFill>
                   <a:srgbClr val="7B3A8E"/>
                 </a:solidFill>
@@ -8024,14 +7909,14 @@
               <a:buNone/>
             </a:pPr>
             <a:r>
-              <a:rPr lang="en-US" sz="1600" dirty="0">
+              <a:rPr lang="en-US" sz="2000" dirty="0">
                 <a:solidFill>
                   <a:srgbClr val="141B26"/>
                 </a:solidFill>
               </a:rPr>
               <a:t>What word describes organisms that gather in groups?</a:t>
             </a:r>
-            <a:endParaRPr lang="en-US" sz="1600" dirty="0"/>
+            <a:endParaRPr lang="en-US" sz="2000" dirty="0"/>
           </a:p>
         </p:txBody>
       </p:sp>
